--- a/documents/20141203_dinocvLib 적용 및 테스트.pptx
+++ b/documents/20141203_dinocvLib 적용 및 테스트.pptx
@@ -1013,7 +1013,7 @@
           <a:p>
             <a:fld id="{FB30EDBD-1C2D-4C1E-B459-B60219FAB484}" type="datetimeFigureOut">
               <a:rPr lang="ko-KR" altLang="en-US" smtClean="0"/>
-              <a:t>2014-12-31</a:t>
+              <a:t>2015. 3. 24.</a:t>
             </a:fld>
             <a:endParaRPr lang="ko-KR" altLang="en-US" dirty="0"/>
           </a:p>
@@ -1600,7 +1600,7 @@
           <a:p>
             <a:fld id="{FB30EDBD-1C2D-4C1E-B459-B60219FAB484}" type="datetimeFigureOut">
               <a:rPr lang="ko-KR" altLang="en-US" smtClean="0"/>
-              <a:t>2014-12-31</a:t>
+              <a:t>2015. 3. 24.</a:t>
             </a:fld>
             <a:endParaRPr lang="ko-KR" altLang="en-US"/>
           </a:p>
@@ -1775,7 +1775,7 @@
           <a:p>
             <a:fld id="{FB30EDBD-1C2D-4C1E-B459-B60219FAB484}" type="datetimeFigureOut">
               <a:rPr lang="ko-KR" altLang="en-US" smtClean="0"/>
-              <a:t>2014-12-31</a:t>
+              <a:t>2015. 3. 24.</a:t>
             </a:fld>
             <a:endParaRPr lang="ko-KR" altLang="en-US"/>
           </a:p>
@@ -2442,7 +2442,7 @@
           <a:p>
             <a:fld id="{FB30EDBD-1C2D-4C1E-B459-B60219FAB484}" type="datetimeFigureOut">
               <a:rPr lang="ko-KR" altLang="en-US" smtClean="0"/>
-              <a:t>2014-12-31</a:t>
+              <a:t>2015. 3. 24.</a:t>
             </a:fld>
             <a:endParaRPr lang="ko-KR" altLang="en-US" dirty="0"/>
           </a:p>
@@ -2693,7 +2693,7 @@
           <a:p>
             <a:fld id="{FB30EDBD-1C2D-4C1E-B459-B60219FAB484}" type="datetimeFigureOut">
               <a:rPr lang="ko-KR" altLang="en-US" smtClean="0"/>
-              <a:t>2014-12-31</a:t>
+              <a:t>2015. 3. 24.</a:t>
             </a:fld>
             <a:endParaRPr lang="ko-KR" altLang="en-US"/>
           </a:p>
@@ -2983,7 +2983,7 @@
           <a:p>
             <a:fld id="{FB30EDBD-1C2D-4C1E-B459-B60219FAB484}" type="datetimeFigureOut">
               <a:rPr lang="ko-KR" altLang="en-US" smtClean="0"/>
-              <a:t>2014-12-31</a:t>
+              <a:t>2015. 3. 24.</a:t>
             </a:fld>
             <a:endParaRPr lang="ko-KR" altLang="en-US"/>
           </a:p>
@@ -3400,7 +3400,7 @@
           <a:p>
             <a:fld id="{FB30EDBD-1C2D-4C1E-B459-B60219FAB484}" type="datetimeFigureOut">
               <a:rPr lang="ko-KR" altLang="en-US" smtClean="0"/>
-              <a:t>2014-12-31</a:t>
+              <a:t>2015. 3. 24.</a:t>
             </a:fld>
             <a:endParaRPr lang="ko-KR" altLang="en-US"/>
           </a:p>
@@ -3513,7 +3513,7 @@
           <a:p>
             <a:fld id="{FB30EDBD-1C2D-4C1E-B459-B60219FAB484}" type="datetimeFigureOut">
               <a:rPr lang="ko-KR" altLang="en-US" smtClean="0"/>
-              <a:t>2014-12-31</a:t>
+              <a:t>2015. 3. 24.</a:t>
             </a:fld>
             <a:endParaRPr lang="ko-KR" altLang="en-US"/>
           </a:p>
@@ -3603,7 +3603,7 @@
           <a:p>
             <a:fld id="{FB30EDBD-1C2D-4C1E-B459-B60219FAB484}" type="datetimeFigureOut">
               <a:rPr lang="ko-KR" altLang="en-US" smtClean="0"/>
-              <a:t>2014-12-31</a:t>
+              <a:t>2015. 3. 24.</a:t>
             </a:fld>
             <a:endParaRPr lang="ko-KR" altLang="en-US"/>
           </a:p>
@@ -3875,7 +3875,7 @@
           <a:p>
             <a:fld id="{FB30EDBD-1C2D-4C1E-B459-B60219FAB484}" type="datetimeFigureOut">
               <a:rPr lang="ko-KR" altLang="en-US" smtClean="0"/>
-              <a:t>2014-12-31</a:t>
+              <a:t>2015. 3. 24.</a:t>
             </a:fld>
             <a:endParaRPr lang="ko-KR" altLang="en-US"/>
           </a:p>
@@ -4123,7 +4123,7 @@
           <a:p>
             <a:fld id="{FB30EDBD-1C2D-4C1E-B459-B60219FAB484}" type="datetimeFigureOut">
               <a:rPr lang="ko-KR" altLang="en-US" smtClean="0"/>
-              <a:t>2014-12-31</a:t>
+              <a:t>2015. 3. 24.</a:t>
             </a:fld>
             <a:endParaRPr lang="ko-KR" altLang="en-US"/>
           </a:p>
@@ -4331,7 +4331,7 @@
           <a:p>
             <a:fld id="{FB30EDBD-1C2D-4C1E-B459-B60219FAB484}" type="datetimeFigureOut">
               <a:rPr lang="ko-KR" altLang="en-US" smtClean="0"/>
-              <a:t>2014-12-31</a:t>
+              <a:t>2015. 3. 24.</a:t>
             </a:fld>
             <a:endParaRPr lang="ko-KR" altLang="en-US"/>
           </a:p>
@@ -5813,11 +5813,7 @@
             </a:pPr>
             <a:r>
               <a:rPr lang="ko-KR" altLang="en-US" dirty="0" smtClean="0"/>
-              <a:t>윈도우에서 </a:t>
-            </a:r>
-            <a:r>
-              <a:rPr lang="ko-KR" altLang="en-US" dirty="0" smtClean="0"/>
-              <a:t>라이브러리 로딩 방법</a:t>
+              <a:t>윈도우에서 라이브러리 로딩 방법</a:t>
             </a:r>
             <a:endParaRPr lang="en-US" altLang="ko-KR" dirty="0" smtClean="0"/>
           </a:p>
@@ -5972,2089 +5968,1669 @@
           </a:p>
         </p:txBody>
       </p:sp>
-      <p:grpSp>
-        <p:nvGrpSpPr>
-          <p:cNvPr id="43" name="그룹 42"/>
-          <p:cNvGrpSpPr/>
+      <p:sp>
+        <p:nvSpPr>
+          <p:cNvPr id="5" name="모서리가 둥근 직사각형 4"/>
+          <p:cNvSpPr/>
           <p:nvPr/>
-        </p:nvGrpSpPr>
-        <p:grpSpPr>
+        </p:nvSpPr>
+        <p:spPr>
           <a:xfrm>
-            <a:off x="971600" y="1057300"/>
-            <a:ext cx="6984776" cy="4263878"/>
-            <a:chOff x="93685" y="1412776"/>
-            <a:chExt cx="8870803" cy="5415209"/>
-          </a:xfrm>
-        </p:grpSpPr>
-        <p:grpSp>
-          <p:nvGrpSpPr>
-            <p:cNvPr id="4" name="그룹 3"/>
-            <p:cNvGrpSpPr/>
-            <p:nvPr/>
-          </p:nvGrpSpPr>
-          <p:grpSpPr>
-            <a:xfrm>
-              <a:off x="2339752" y="1412776"/>
-              <a:ext cx="6624736" cy="2160240"/>
-              <a:chOff x="2339752" y="260648"/>
-              <a:chExt cx="6624736" cy="2160240"/>
-            </a:xfrm>
-          </p:grpSpPr>
-          <p:sp>
-            <p:nvSpPr>
-              <p:cNvPr id="5" name="모서리가 둥근 직사각형 4"/>
-              <p:cNvSpPr/>
-              <p:nvPr/>
-            </p:nvSpPr>
-            <p:spPr>
-              <a:xfrm>
-                <a:off x="4932040" y="420688"/>
-                <a:ext cx="1440160" cy="360040"/>
-              </a:xfrm>
-              <a:prstGeom prst="roundRect">
-                <a:avLst/>
-              </a:prstGeom>
+            <a:off x="2903792" y="2010678"/>
+            <a:ext cx="1133967" cy="257720"/>
+          </a:xfrm>
+          <a:prstGeom prst="roundRect">
+            <a:avLst/>
+          </a:prstGeom>
+          <a:solidFill>
+            <a:schemeClr val="accent6">
+              <a:lumMod val="75000"/>
+            </a:schemeClr>
+          </a:solidFill>
+          <a:ln>
+            <a:noFill/>
+          </a:ln>
+        </p:spPr>
+        <p:style>
+          <a:lnRef idx="2">
+            <a:schemeClr val="accent1">
+              <a:shade val="50000"/>
+            </a:schemeClr>
+          </a:lnRef>
+          <a:fillRef idx="1">
+            <a:schemeClr val="accent1"/>
+          </a:fillRef>
+          <a:effectRef idx="0">
+            <a:schemeClr val="accent1"/>
+          </a:effectRef>
+          <a:fontRef idx="minor">
+            <a:schemeClr val="lt1"/>
+          </a:fontRef>
+        </p:style>
+        <p:txBody>
+          <a:bodyPr rtlCol="0" anchor="ctr"/>
+          <a:lstStyle/>
+          <a:p>
+            <a:pPr algn="ctr"/>
+            <a:r>
+              <a:rPr lang="en-US" altLang="ko-KR" sz="1200" dirty="0" err="1" smtClean="0"/>
+              <a:t>imgcore</a:t>
+            </a:r>
+            <a:endParaRPr lang="ko-KR" altLang="en-US" sz="1200" dirty="0"/>
+          </a:p>
+        </p:txBody>
+      </p:sp>
+      <p:sp>
+        <p:nvSpPr>
+          <p:cNvPr id="6" name="모서리가 둥근 직사각형 5"/>
+          <p:cNvSpPr/>
+          <p:nvPr/>
+        </p:nvSpPr>
+        <p:spPr>
+          <a:xfrm>
+            <a:off x="2289919" y="2531464"/>
+            <a:ext cx="1133967" cy="257720"/>
+          </a:xfrm>
+          <a:prstGeom prst="roundRect">
+            <a:avLst/>
+          </a:prstGeom>
+          <a:solidFill>
+            <a:schemeClr val="accent6">
+              <a:lumMod val="75000"/>
+            </a:schemeClr>
+          </a:solidFill>
+          <a:ln>
+            <a:noFill/>
+          </a:ln>
+        </p:spPr>
+        <p:style>
+          <a:lnRef idx="2">
+            <a:schemeClr val="accent1">
+              <a:shade val="50000"/>
+            </a:schemeClr>
+          </a:lnRef>
+          <a:fillRef idx="1">
+            <a:schemeClr val="accent1"/>
+          </a:fillRef>
+          <a:effectRef idx="0">
+            <a:schemeClr val="accent1"/>
+          </a:effectRef>
+          <a:fontRef idx="minor">
+            <a:schemeClr val="lt1"/>
+          </a:fontRef>
+        </p:style>
+        <p:txBody>
+          <a:bodyPr rtlCol="0" anchor="ctr"/>
+          <a:lstStyle/>
+          <a:p>
+            <a:pPr algn="ctr"/>
+            <a:r>
+              <a:rPr lang="en-US" altLang="ko-KR" sz="1200" dirty="0" err="1" smtClean="0"/>
+              <a:t>bmpanal</a:t>
+            </a:r>
+            <a:endParaRPr lang="ko-KR" altLang="en-US" sz="1200" dirty="0"/>
+          </a:p>
+        </p:txBody>
+      </p:sp>
+      <p:sp>
+        <p:nvSpPr>
+          <p:cNvPr id="7" name="모서리가 둥근 직사각형 6"/>
+          <p:cNvSpPr/>
+          <p:nvPr/>
+        </p:nvSpPr>
+        <p:spPr>
+          <a:xfrm>
+            <a:off x="3537282" y="2532702"/>
+            <a:ext cx="1133967" cy="257720"/>
+          </a:xfrm>
+          <a:prstGeom prst="roundRect">
+            <a:avLst/>
+          </a:prstGeom>
+          <a:solidFill>
+            <a:schemeClr val="accent6">
+              <a:lumMod val="75000"/>
+            </a:schemeClr>
+          </a:solidFill>
+          <a:ln>
+            <a:noFill/>
+          </a:ln>
+        </p:spPr>
+        <p:style>
+          <a:lnRef idx="2">
+            <a:schemeClr val="accent1">
+              <a:shade val="50000"/>
+            </a:schemeClr>
+          </a:lnRef>
+          <a:fillRef idx="1">
+            <a:schemeClr val="accent1"/>
+          </a:fillRef>
+          <a:effectRef idx="0">
+            <a:schemeClr val="accent1"/>
+          </a:effectRef>
+          <a:fontRef idx="minor">
+            <a:schemeClr val="lt1"/>
+          </a:fontRef>
+        </p:style>
+        <p:txBody>
+          <a:bodyPr rtlCol="0" anchor="ctr"/>
+          <a:lstStyle/>
+          <a:p>
+            <a:pPr algn="ctr"/>
+            <a:r>
+              <a:rPr lang="en-US" altLang="ko-KR" sz="1200" dirty="0" err="1" smtClean="0"/>
+              <a:t>ppmanal</a:t>
+            </a:r>
+            <a:endParaRPr lang="ko-KR" altLang="en-US" sz="1200" dirty="0"/>
+          </a:p>
+        </p:txBody>
+      </p:sp>
+      <p:sp>
+        <p:nvSpPr>
+          <p:cNvPr id="8" name="모서리가 둥근 직사각형 7"/>
+          <p:cNvSpPr/>
+          <p:nvPr/>
+        </p:nvSpPr>
+        <p:spPr>
+          <a:xfrm>
+            <a:off x="2904514" y="3042256"/>
+            <a:ext cx="1133967" cy="257720"/>
+          </a:xfrm>
+          <a:prstGeom prst="roundRect">
+            <a:avLst/>
+          </a:prstGeom>
+          <a:solidFill>
+            <a:schemeClr val="accent5"/>
+          </a:solidFill>
+          <a:ln>
+            <a:noFill/>
+          </a:ln>
+        </p:spPr>
+        <p:style>
+          <a:lnRef idx="2">
+            <a:schemeClr val="accent1">
+              <a:shade val="50000"/>
+            </a:schemeClr>
+          </a:lnRef>
+          <a:fillRef idx="1">
+            <a:schemeClr val="accent1"/>
+          </a:fillRef>
+          <a:effectRef idx="0">
+            <a:schemeClr val="accent1"/>
+          </a:effectRef>
+          <a:fontRef idx="minor">
+            <a:schemeClr val="lt1"/>
+          </a:fontRef>
+        </p:style>
+        <p:txBody>
+          <a:bodyPr rtlCol="0" anchor="ctr"/>
+          <a:lstStyle/>
+          <a:p>
+            <a:pPr algn="ctr"/>
+            <a:r>
+              <a:rPr lang="en-US" altLang="ko-KR" sz="1200" dirty="0" err="1" smtClean="0"/>
+              <a:t>imageio</a:t>
+            </a:r>
+            <a:endParaRPr lang="ko-KR" altLang="en-US" sz="1200" dirty="0"/>
+          </a:p>
+        </p:txBody>
+      </p:sp>
+      <p:sp>
+        <p:nvSpPr>
+          <p:cNvPr id="9" name="모서리가 둥근 직사각형 8"/>
+          <p:cNvSpPr/>
+          <p:nvPr/>
+        </p:nvSpPr>
+        <p:spPr>
+          <a:xfrm>
+            <a:off x="5238100" y="1997603"/>
+            <a:ext cx="1133967" cy="257720"/>
+          </a:xfrm>
+          <a:prstGeom prst="roundRect">
+            <a:avLst/>
+          </a:prstGeom>
+          <a:solidFill>
+            <a:schemeClr val="accent5"/>
+          </a:solidFill>
+          <a:ln>
+            <a:noFill/>
+          </a:ln>
+        </p:spPr>
+        <p:style>
+          <a:lnRef idx="2">
+            <a:schemeClr val="accent1">
+              <a:shade val="50000"/>
+            </a:schemeClr>
+          </a:lnRef>
+          <a:fillRef idx="1">
+            <a:schemeClr val="accent1"/>
+          </a:fillRef>
+          <a:effectRef idx="0">
+            <a:schemeClr val="accent1"/>
+          </a:effectRef>
+          <a:fontRef idx="minor">
+            <a:schemeClr val="lt1"/>
+          </a:fontRef>
+        </p:style>
+        <p:txBody>
+          <a:bodyPr rtlCol="0" anchor="ctr"/>
+          <a:lstStyle/>
+          <a:p>
+            <a:pPr algn="ctr"/>
+            <a:r>
+              <a:rPr lang="en-US" altLang="ko-KR" sz="1200" dirty="0" err="1" smtClean="0"/>
+              <a:t>imgdraw</a:t>
+            </a:r>
+            <a:endParaRPr lang="ko-KR" altLang="en-US" sz="1200" dirty="0"/>
+          </a:p>
+        </p:txBody>
+      </p:sp>
+      <p:cxnSp>
+        <p:nvCxnSpPr>
+          <p:cNvPr id="10" name="꺾인 연결선 9"/>
+          <p:cNvCxnSpPr>
+            <a:stCxn id="5" idx="2"/>
+            <a:endCxn id="6" idx="0"/>
+          </p:cNvCxnSpPr>
+          <p:nvPr/>
+        </p:nvCxnSpPr>
+        <p:spPr>
+          <a:xfrm rot="5400000">
+            <a:off x="3032307" y="2092995"/>
+            <a:ext cx="263066" cy="613873"/>
+          </a:xfrm>
+          <a:prstGeom prst="bentConnector3">
+            <a:avLst/>
+          </a:prstGeom>
+          <a:ln w="12700">
+            <a:solidFill>
+              <a:schemeClr val="tx1"/>
+            </a:solidFill>
+          </a:ln>
+        </p:spPr>
+        <p:style>
+          <a:lnRef idx="1">
+            <a:schemeClr val="accent1"/>
+          </a:lnRef>
+          <a:fillRef idx="0">
+            <a:schemeClr val="accent1"/>
+          </a:fillRef>
+          <a:effectRef idx="0">
+            <a:schemeClr val="accent1"/>
+          </a:effectRef>
+          <a:fontRef idx="minor">
+            <a:schemeClr val="tx1"/>
+          </a:fontRef>
+        </p:style>
+      </p:cxnSp>
+      <p:cxnSp>
+        <p:nvCxnSpPr>
+          <p:cNvPr id="11" name="꺾인 연결선 10"/>
+          <p:cNvCxnSpPr>
+            <a:stCxn id="5" idx="2"/>
+            <a:endCxn id="7" idx="0"/>
+          </p:cNvCxnSpPr>
+          <p:nvPr/>
+        </p:nvCxnSpPr>
+        <p:spPr>
+          <a:xfrm rot="16200000" flipH="1">
+            <a:off x="3655369" y="2083805"/>
+            <a:ext cx="264304" cy="633490"/>
+          </a:xfrm>
+          <a:prstGeom prst="bentConnector3">
+            <a:avLst/>
+          </a:prstGeom>
+          <a:ln w="12700">
+            <a:solidFill>
+              <a:schemeClr val="tx1"/>
+            </a:solidFill>
+          </a:ln>
+        </p:spPr>
+        <p:style>
+          <a:lnRef idx="1">
+            <a:schemeClr val="accent1"/>
+          </a:lnRef>
+          <a:fillRef idx="0">
+            <a:schemeClr val="accent1"/>
+          </a:fillRef>
+          <a:effectRef idx="0">
+            <a:schemeClr val="accent1"/>
+          </a:effectRef>
+          <a:fontRef idx="minor">
+            <a:schemeClr val="tx1"/>
+          </a:fontRef>
+        </p:style>
+      </p:cxnSp>
+      <p:cxnSp>
+        <p:nvCxnSpPr>
+          <p:cNvPr id="12" name="꺾인 연결선 11"/>
+          <p:cNvCxnSpPr>
+            <a:stCxn id="6" idx="2"/>
+            <a:endCxn id="8" idx="0"/>
+          </p:cNvCxnSpPr>
+          <p:nvPr/>
+        </p:nvCxnSpPr>
+        <p:spPr>
+          <a:xfrm rot="16200000" flipH="1">
+            <a:off x="3037664" y="2608422"/>
+            <a:ext cx="253072" cy="614595"/>
+          </a:xfrm>
+          <a:prstGeom prst="bentConnector3">
+            <a:avLst/>
+          </a:prstGeom>
+          <a:ln w="12700">
+            <a:solidFill>
+              <a:schemeClr val="tx1"/>
+            </a:solidFill>
+          </a:ln>
+        </p:spPr>
+        <p:style>
+          <a:lnRef idx="1">
+            <a:schemeClr val="accent1"/>
+          </a:lnRef>
+          <a:fillRef idx="0">
+            <a:schemeClr val="accent1"/>
+          </a:fillRef>
+          <a:effectRef idx="0">
+            <a:schemeClr val="accent1"/>
+          </a:effectRef>
+          <a:fontRef idx="minor">
+            <a:schemeClr val="tx1"/>
+          </a:fontRef>
+        </p:style>
+      </p:cxnSp>
+      <p:cxnSp>
+        <p:nvCxnSpPr>
+          <p:cNvPr id="13" name="꺾인 연결선 12"/>
+          <p:cNvCxnSpPr>
+            <a:stCxn id="7" idx="2"/>
+            <a:endCxn id="8" idx="0"/>
+          </p:cNvCxnSpPr>
+          <p:nvPr/>
+        </p:nvCxnSpPr>
+        <p:spPr>
+          <a:xfrm rot="5400000">
+            <a:off x="3661965" y="2599955"/>
+            <a:ext cx="251834" cy="632768"/>
+          </a:xfrm>
+          <a:prstGeom prst="bentConnector3">
+            <a:avLst/>
+          </a:prstGeom>
+          <a:ln w="12700">
+            <a:solidFill>
+              <a:schemeClr val="tx1"/>
+            </a:solidFill>
+          </a:ln>
+        </p:spPr>
+        <p:style>
+          <a:lnRef idx="1">
+            <a:schemeClr val="accent1"/>
+          </a:lnRef>
+          <a:fillRef idx="0">
+            <a:schemeClr val="accent1"/>
+          </a:fillRef>
+          <a:effectRef idx="0">
+            <a:schemeClr val="accent1"/>
+          </a:effectRef>
+          <a:fontRef idx="minor">
+            <a:schemeClr val="tx1"/>
+          </a:fontRef>
+        </p:style>
+      </p:cxnSp>
+      <p:sp>
+        <p:nvSpPr>
+          <p:cNvPr id="14" name="모서리가 둥근 직사각형 13"/>
+          <p:cNvSpPr/>
+          <p:nvPr/>
+        </p:nvSpPr>
+        <p:spPr>
+          <a:xfrm>
+            <a:off x="5222929" y="1591984"/>
+            <a:ext cx="1133967" cy="260297"/>
+          </a:xfrm>
+          <a:prstGeom prst="roundRect">
+            <a:avLst/>
+          </a:prstGeom>
+          <a:solidFill>
+            <a:schemeClr val="accent5"/>
+          </a:solidFill>
+          <a:ln>
+            <a:noFill/>
+          </a:ln>
+        </p:spPr>
+        <p:style>
+          <a:lnRef idx="2">
+            <a:schemeClr val="accent1">
+              <a:shade val="50000"/>
+            </a:schemeClr>
+          </a:lnRef>
+          <a:fillRef idx="1">
+            <a:schemeClr val="accent1"/>
+          </a:fillRef>
+          <a:effectRef idx="0">
+            <a:schemeClr val="accent1"/>
+          </a:effectRef>
+          <a:fontRef idx="minor">
+            <a:schemeClr val="lt1"/>
+          </a:fontRef>
+        </p:style>
+        <p:txBody>
+          <a:bodyPr rtlCol="0" anchor="ctr"/>
+          <a:lstStyle/>
+          <a:p>
+            <a:pPr algn="ctr"/>
+            <a:r>
+              <a:rPr lang="en-US" altLang="ko-KR" sz="1200" dirty="0" err="1" smtClean="0"/>
+              <a:t>imgtrans</a:t>
+            </a:r>
+            <a:endParaRPr lang="ko-KR" altLang="en-US" sz="1200" dirty="0"/>
+          </a:p>
+        </p:txBody>
+      </p:sp>
+      <p:cxnSp>
+        <p:nvCxnSpPr>
+          <p:cNvPr id="15" name="직선 연결선 14"/>
+          <p:cNvCxnSpPr>
+            <a:stCxn id="5" idx="3"/>
+            <a:endCxn id="14" idx="1"/>
+          </p:cNvCxnSpPr>
+          <p:nvPr/>
+        </p:nvCxnSpPr>
+        <p:spPr>
+          <a:xfrm flipV="1">
+            <a:off x="4037759" y="1722133"/>
+            <a:ext cx="1185170" cy="417405"/>
+          </a:xfrm>
+          <a:prstGeom prst="line">
+            <a:avLst/>
+          </a:prstGeom>
+          <a:ln w="12700">
+            <a:solidFill>
+              <a:schemeClr val="tx1"/>
+            </a:solidFill>
+          </a:ln>
+        </p:spPr>
+        <p:style>
+          <a:lnRef idx="1">
+            <a:schemeClr val="accent1"/>
+          </a:lnRef>
+          <a:fillRef idx="0">
+            <a:schemeClr val="accent1"/>
+          </a:fillRef>
+          <a:effectRef idx="0">
+            <a:schemeClr val="accent1"/>
+          </a:effectRef>
+          <a:fontRef idx="minor">
+            <a:schemeClr val="tx1"/>
+          </a:fontRef>
+        </p:style>
+      </p:cxnSp>
+      <p:cxnSp>
+        <p:nvCxnSpPr>
+          <p:cNvPr id="16" name="직선 연결선 15"/>
+          <p:cNvCxnSpPr>
+            <a:stCxn id="5" idx="3"/>
+            <a:endCxn id="9" idx="1"/>
+          </p:cNvCxnSpPr>
+          <p:nvPr/>
+        </p:nvCxnSpPr>
+        <p:spPr>
+          <a:xfrm flipV="1">
+            <a:off x="4037759" y="2126463"/>
+            <a:ext cx="1200341" cy="13075"/>
+          </a:xfrm>
+          <a:prstGeom prst="line">
+            <a:avLst/>
+          </a:prstGeom>
+          <a:ln w="12700">
+            <a:solidFill>
+              <a:schemeClr val="tx1"/>
+            </a:solidFill>
+          </a:ln>
+        </p:spPr>
+        <p:style>
+          <a:lnRef idx="1">
+            <a:schemeClr val="accent1"/>
+          </a:lnRef>
+          <a:fillRef idx="0">
+            <a:schemeClr val="accent1"/>
+          </a:fillRef>
+          <a:effectRef idx="0">
+            <a:schemeClr val="accent1"/>
+          </a:effectRef>
+          <a:fontRef idx="minor">
+            <a:schemeClr val="tx1"/>
+          </a:fontRef>
+        </p:style>
+      </p:cxnSp>
+      <p:sp>
+        <p:nvSpPr>
+          <p:cNvPr id="17" name="모서리가 둥근 직사각형 16"/>
+          <p:cNvSpPr/>
+          <p:nvPr/>
+        </p:nvSpPr>
+        <p:spPr>
+          <a:xfrm>
+            <a:off x="2051720" y="1075035"/>
+            <a:ext cx="4536504" cy="2367404"/>
+          </a:xfrm>
+          <a:prstGeom prst="roundRect">
+            <a:avLst/>
+          </a:prstGeom>
+          <a:noFill/>
+          <a:ln>
+            <a:solidFill>
+              <a:schemeClr val="accent6">
+                <a:lumMod val="75000"/>
+              </a:schemeClr>
+            </a:solidFill>
+          </a:ln>
+        </p:spPr>
+        <p:style>
+          <a:lnRef idx="2">
+            <a:schemeClr val="accent1">
+              <a:shade val="50000"/>
+            </a:schemeClr>
+          </a:lnRef>
+          <a:fillRef idx="1">
+            <a:schemeClr val="accent1"/>
+          </a:fillRef>
+          <a:effectRef idx="0">
+            <a:schemeClr val="accent1"/>
+          </a:effectRef>
+          <a:fontRef idx="minor">
+            <a:schemeClr val="lt1"/>
+          </a:fontRef>
+        </p:style>
+        <p:txBody>
+          <a:bodyPr rtlCol="0" anchor="ctr"/>
+          <a:lstStyle/>
+          <a:p>
+            <a:pPr algn="r"/>
+            <a:endParaRPr lang="en-US" altLang="ko-KR" sz="1200" dirty="0" smtClean="0">
               <a:solidFill>
-                <a:schemeClr val="accent6">
-                  <a:lumMod val="75000"/>
-                </a:schemeClr>
+                <a:schemeClr val="tx1"/>
               </a:solidFill>
-              <a:ln>
-                <a:noFill/>
-              </a:ln>
-            </p:spPr>
-            <p:style>
-              <a:lnRef idx="2">
-                <a:schemeClr val="accent1">
-                  <a:shade val="50000"/>
-                </a:schemeClr>
-              </a:lnRef>
-              <a:fillRef idx="1">
-                <a:schemeClr val="accent1"/>
-              </a:fillRef>
-              <a:effectRef idx="0">
-                <a:schemeClr val="accent1"/>
-              </a:effectRef>
-              <a:fontRef idx="minor">
-                <a:schemeClr val="lt1"/>
-              </a:fontRef>
-            </p:style>
-            <p:txBody>
-              <a:bodyPr rtlCol="0" anchor="ctr"/>
-              <a:lstStyle/>
-              <a:p>
-                <a:pPr algn="ctr"/>
-                <a:r>
-                  <a:rPr lang="en-US" altLang="ko-KR" sz="1200" dirty="0" err="1" smtClean="0"/>
-                  <a:t>imgcore</a:t>
-                </a:r>
-                <a:endParaRPr lang="ko-KR" altLang="en-US" sz="1200" dirty="0"/>
-              </a:p>
-            </p:txBody>
-          </p:sp>
-          <p:sp>
-            <p:nvSpPr>
-              <p:cNvPr id="6" name="모서리가 둥근 직사각형 5"/>
-              <p:cNvSpPr/>
-              <p:nvPr/>
-            </p:nvSpPr>
-            <p:spPr>
-              <a:xfrm>
-                <a:off x="4139952" y="1051007"/>
-                <a:ext cx="1440160" cy="360040"/>
-              </a:xfrm>
-              <a:prstGeom prst="roundRect">
-                <a:avLst/>
-              </a:prstGeom>
+            </a:endParaRPr>
+          </a:p>
+          <a:p>
+            <a:pPr algn="r"/>
+            <a:endParaRPr lang="en-US" altLang="ko-KR" sz="1200" dirty="0">
               <a:solidFill>
-                <a:schemeClr val="accent6">
-                  <a:lumMod val="75000"/>
-                </a:schemeClr>
+                <a:schemeClr val="tx1"/>
               </a:solidFill>
-              <a:ln>
-                <a:noFill/>
-              </a:ln>
-            </p:spPr>
-            <p:style>
-              <a:lnRef idx="2">
-                <a:schemeClr val="accent1">
-                  <a:shade val="50000"/>
-                </a:schemeClr>
-              </a:lnRef>
-              <a:fillRef idx="1">
-                <a:schemeClr val="accent1"/>
-              </a:fillRef>
-              <a:effectRef idx="0">
-                <a:schemeClr val="accent1"/>
-              </a:effectRef>
-              <a:fontRef idx="minor">
-                <a:schemeClr val="lt1"/>
-              </a:fontRef>
-            </p:style>
-            <p:txBody>
-              <a:bodyPr rtlCol="0" anchor="ctr"/>
-              <a:lstStyle/>
-              <a:p>
-                <a:pPr algn="ctr"/>
-                <a:r>
-                  <a:rPr lang="en-US" altLang="ko-KR" sz="1200" dirty="0" err="1" smtClean="0"/>
-                  <a:t>bmpanal</a:t>
-                </a:r>
-                <a:endParaRPr lang="ko-KR" altLang="en-US" sz="1200" dirty="0"/>
-              </a:p>
-            </p:txBody>
-          </p:sp>
-          <p:sp>
-            <p:nvSpPr>
-              <p:cNvPr id="7" name="모서리가 둥근 직사각형 6"/>
-              <p:cNvSpPr/>
-              <p:nvPr/>
-            </p:nvSpPr>
-            <p:spPr>
-              <a:xfrm>
-                <a:off x="5724128" y="1052736"/>
-                <a:ext cx="1440160" cy="360040"/>
-              </a:xfrm>
-              <a:prstGeom prst="roundRect">
-                <a:avLst/>
-              </a:prstGeom>
+            </a:endParaRPr>
+          </a:p>
+          <a:p>
+            <a:pPr algn="r"/>
+            <a:endParaRPr lang="en-US" altLang="ko-KR" sz="1200" dirty="0" smtClean="0">
               <a:solidFill>
-                <a:schemeClr val="accent6">
-                  <a:lumMod val="75000"/>
-                </a:schemeClr>
+                <a:schemeClr val="tx1"/>
               </a:solidFill>
-              <a:ln>
-                <a:noFill/>
-              </a:ln>
-            </p:spPr>
-            <p:style>
-              <a:lnRef idx="2">
-                <a:schemeClr val="accent1">
-                  <a:shade val="50000"/>
-                </a:schemeClr>
-              </a:lnRef>
-              <a:fillRef idx="1">
-                <a:schemeClr val="accent1"/>
-              </a:fillRef>
-              <a:effectRef idx="0">
-                <a:schemeClr val="accent1"/>
-              </a:effectRef>
-              <a:fontRef idx="minor">
-                <a:schemeClr val="lt1"/>
-              </a:fontRef>
-            </p:style>
-            <p:txBody>
-              <a:bodyPr rtlCol="0" anchor="ctr"/>
-              <a:lstStyle/>
-              <a:p>
-                <a:pPr algn="ctr"/>
-                <a:r>
-                  <a:rPr lang="en-US" altLang="ko-KR" sz="1200" dirty="0" err="1" smtClean="0"/>
-                  <a:t>ppmanal</a:t>
-                </a:r>
-                <a:endParaRPr lang="ko-KR" altLang="en-US" sz="1200" dirty="0"/>
-              </a:p>
-            </p:txBody>
-          </p:sp>
-          <p:sp>
-            <p:nvSpPr>
-              <p:cNvPr id="8" name="모서리가 둥근 직사각형 7"/>
-              <p:cNvSpPr/>
-              <p:nvPr/>
-            </p:nvSpPr>
-            <p:spPr>
-              <a:xfrm>
-                <a:off x="4932040" y="1926942"/>
-                <a:ext cx="1440160" cy="360040"/>
-              </a:xfrm>
-              <a:prstGeom prst="roundRect">
-                <a:avLst/>
-              </a:prstGeom>
+            </a:endParaRPr>
+          </a:p>
+          <a:p>
+            <a:pPr algn="r"/>
+            <a:endParaRPr lang="en-US" altLang="ko-KR" sz="1200" dirty="0">
               <a:solidFill>
-                <a:schemeClr val="accent6">
-                  <a:lumMod val="75000"/>
-                </a:schemeClr>
+                <a:schemeClr val="tx1"/>
               </a:solidFill>
-              <a:ln>
-                <a:noFill/>
-              </a:ln>
-            </p:spPr>
-            <p:style>
-              <a:lnRef idx="2">
-                <a:schemeClr val="accent1">
-                  <a:shade val="50000"/>
-                </a:schemeClr>
-              </a:lnRef>
-              <a:fillRef idx="1">
-                <a:schemeClr val="accent1"/>
-              </a:fillRef>
-              <a:effectRef idx="0">
-                <a:schemeClr val="accent1"/>
-              </a:effectRef>
-              <a:fontRef idx="minor">
-                <a:schemeClr val="lt1"/>
-              </a:fontRef>
-            </p:style>
-            <p:txBody>
-              <a:bodyPr rtlCol="0" anchor="ctr"/>
-              <a:lstStyle/>
-              <a:p>
-                <a:pPr algn="ctr"/>
-                <a:r>
-                  <a:rPr lang="en-US" altLang="ko-KR" sz="1200" dirty="0" err="1" smtClean="0"/>
-                  <a:t>imageio</a:t>
-                </a:r>
-                <a:endParaRPr lang="ko-KR" altLang="en-US" sz="1200" dirty="0"/>
-              </a:p>
-            </p:txBody>
-          </p:sp>
-          <p:sp>
-            <p:nvSpPr>
-              <p:cNvPr id="9" name="모서리가 둥근 직사각형 8"/>
-              <p:cNvSpPr/>
-              <p:nvPr/>
-            </p:nvSpPr>
-            <p:spPr>
-              <a:xfrm>
-                <a:off x="7380312" y="420687"/>
-                <a:ext cx="1440160" cy="360040"/>
-              </a:xfrm>
-              <a:prstGeom prst="roundRect">
-                <a:avLst/>
-              </a:prstGeom>
+            </a:endParaRPr>
+          </a:p>
+          <a:p>
+            <a:pPr algn="r"/>
+            <a:endParaRPr lang="en-US" altLang="ko-KR" sz="1200" dirty="0" smtClean="0">
               <a:solidFill>
-                <a:schemeClr val="accent6">
-                  <a:lumMod val="75000"/>
-                </a:schemeClr>
+                <a:schemeClr val="tx1"/>
               </a:solidFill>
-              <a:ln>
-                <a:noFill/>
-              </a:ln>
-            </p:spPr>
-            <p:style>
-              <a:lnRef idx="2">
-                <a:schemeClr val="accent1">
-                  <a:shade val="50000"/>
-                </a:schemeClr>
-              </a:lnRef>
-              <a:fillRef idx="1">
-                <a:schemeClr val="accent1"/>
-              </a:fillRef>
-              <a:effectRef idx="0">
-                <a:schemeClr val="accent1"/>
-              </a:effectRef>
-              <a:fontRef idx="minor">
-                <a:schemeClr val="lt1"/>
-              </a:fontRef>
-            </p:style>
-            <p:txBody>
-              <a:bodyPr rtlCol="0" anchor="ctr"/>
-              <a:lstStyle/>
-              <a:p>
-                <a:pPr algn="ctr"/>
-                <a:r>
-                  <a:rPr lang="en-US" altLang="ko-KR" sz="1200" dirty="0" err="1" smtClean="0"/>
-                  <a:t>imgdraw</a:t>
-                </a:r>
-                <a:endParaRPr lang="ko-KR" altLang="en-US" sz="1200" dirty="0"/>
-              </a:p>
-            </p:txBody>
-          </p:sp>
-          <p:cxnSp>
-            <p:nvCxnSpPr>
-              <p:cNvPr id="10" name="꺾인 연결선 9"/>
-              <p:cNvCxnSpPr>
-                <a:stCxn id="5" idx="2"/>
-                <a:endCxn id="6" idx="0"/>
-              </p:cNvCxnSpPr>
-              <p:nvPr/>
-            </p:nvCxnSpPr>
-            <p:spPr>
-              <a:xfrm rot="5400000">
-                <a:off x="5120937" y="519823"/>
-                <a:ext cx="270279" cy="792088"/>
-              </a:xfrm>
-              <a:prstGeom prst="bentConnector3">
-                <a:avLst/>
-              </a:prstGeom>
-              <a:ln w="12700">
+            </a:endParaRPr>
+          </a:p>
+          <a:p>
+            <a:pPr algn="r"/>
+            <a:endParaRPr lang="en-US" altLang="ko-KR" sz="1200" dirty="0" smtClean="0">
+              <a:solidFill>
+                <a:schemeClr val="tx1"/>
+              </a:solidFill>
+            </a:endParaRPr>
+          </a:p>
+          <a:p>
+            <a:pPr algn="r"/>
+            <a:endParaRPr lang="en-US" altLang="ko-KR" sz="1200" dirty="0">
+              <a:solidFill>
+                <a:schemeClr val="tx1"/>
+              </a:solidFill>
+            </a:endParaRPr>
+          </a:p>
+          <a:p>
+            <a:pPr algn="r"/>
+            <a:endParaRPr lang="en-US" altLang="ko-KR" sz="1200" dirty="0" smtClean="0">
+              <a:solidFill>
+                <a:schemeClr val="tx1"/>
+              </a:solidFill>
+            </a:endParaRPr>
+          </a:p>
+          <a:p>
+            <a:pPr algn="r"/>
+            <a:endParaRPr lang="en-US" altLang="ko-KR" sz="1200" dirty="0" smtClean="0">
+              <a:solidFill>
+                <a:schemeClr val="tx1"/>
+              </a:solidFill>
+            </a:endParaRPr>
+          </a:p>
+          <a:p>
+            <a:pPr algn="r"/>
+            <a:endParaRPr lang="en-US" altLang="ko-KR" sz="1200" dirty="0" smtClean="0">
+              <a:solidFill>
+                <a:schemeClr val="tx1"/>
+              </a:solidFill>
+            </a:endParaRPr>
+          </a:p>
+          <a:p>
+            <a:pPr algn="r"/>
+            <a:r>
+              <a:rPr lang="en-US" altLang="ko-KR" sz="1200" dirty="0" err="1">
                 <a:solidFill>
                   <a:schemeClr val="tx1"/>
                 </a:solidFill>
-              </a:ln>
-            </p:spPr>
-            <p:style>
-              <a:lnRef idx="1">
-                <a:schemeClr val="accent1"/>
-              </a:lnRef>
-              <a:fillRef idx="0">
-                <a:schemeClr val="accent1"/>
-              </a:fillRef>
-              <a:effectRef idx="0">
-                <a:schemeClr val="accent1"/>
-              </a:effectRef>
-              <a:fontRef idx="minor">
-                <a:schemeClr val="tx1"/>
-              </a:fontRef>
-            </p:style>
-          </p:cxnSp>
-          <p:cxnSp>
-            <p:nvCxnSpPr>
-              <p:cNvPr id="11" name="꺾인 연결선 10"/>
-              <p:cNvCxnSpPr>
-                <a:stCxn id="5" idx="2"/>
-                <a:endCxn id="7" idx="0"/>
-              </p:cNvCxnSpPr>
-              <p:nvPr/>
-            </p:nvCxnSpPr>
-            <p:spPr>
-              <a:xfrm rot="16200000" flipH="1">
-                <a:off x="5912160" y="520688"/>
-                <a:ext cx="272008" cy="792088"/>
-              </a:xfrm>
-              <a:prstGeom prst="bentConnector3">
-                <a:avLst/>
-              </a:prstGeom>
-              <a:ln w="12700">
+              </a:rPr>
+              <a:t>d</a:t>
+            </a:r>
+            <a:r>
+              <a:rPr lang="en-US" altLang="ko-KR" sz="1200" dirty="0" err="1" smtClean="0">
                 <a:solidFill>
                   <a:schemeClr val="tx1"/>
                 </a:solidFill>
-              </a:ln>
-            </p:spPr>
-            <p:style>
-              <a:lnRef idx="1">
-                <a:schemeClr val="accent1"/>
-              </a:lnRef>
-              <a:fillRef idx="0">
-                <a:schemeClr val="accent1"/>
-              </a:fillRef>
-              <a:effectRef idx="0">
-                <a:schemeClr val="accent1"/>
-              </a:effectRef>
-              <a:fontRef idx="minor">
-                <a:schemeClr val="tx1"/>
-              </a:fontRef>
-            </p:style>
-          </p:cxnSp>
-          <p:cxnSp>
-            <p:nvCxnSpPr>
-              <p:cNvPr id="12" name="꺾인 연결선 11"/>
-              <p:cNvCxnSpPr>
-                <a:stCxn id="6" idx="2"/>
-                <a:endCxn id="8" idx="0"/>
-              </p:cNvCxnSpPr>
-              <p:nvPr/>
-            </p:nvCxnSpPr>
-            <p:spPr>
-              <a:xfrm rot="16200000" flipH="1">
-                <a:off x="4998129" y="1272950"/>
-                <a:ext cx="515895" cy="792088"/>
-              </a:xfrm>
-              <a:prstGeom prst="bentConnector3">
-                <a:avLst/>
-              </a:prstGeom>
-              <a:ln w="12700">
+              </a:rPr>
+              <a:t>ino</a:t>
+            </a:r>
+            <a:r>
+              <a:rPr lang="en-US" altLang="ko-KR" sz="1200" dirty="0" err="1" smtClean="0">
                 <a:solidFill>
                   <a:schemeClr val="tx1"/>
                 </a:solidFill>
-              </a:ln>
-            </p:spPr>
-            <p:style>
-              <a:lnRef idx="1">
-                <a:schemeClr val="accent1"/>
-              </a:lnRef>
-              <a:fillRef idx="0">
-                <a:schemeClr val="accent1"/>
-              </a:fillRef>
-              <a:effectRef idx="0">
-                <a:schemeClr val="accent1"/>
-              </a:effectRef>
-              <a:fontRef idx="minor">
+              </a:rPr>
+              <a:t>core</a:t>
+            </a:r>
+            <a:endParaRPr lang="en-US" altLang="ko-KR" sz="1200" dirty="0" smtClean="0">
+              <a:solidFill>
                 <a:schemeClr val="tx1"/>
-              </a:fontRef>
-            </p:style>
-          </p:cxnSp>
-          <p:cxnSp>
-            <p:nvCxnSpPr>
-              <p:cNvPr id="13" name="꺾인 연결선 12"/>
-              <p:cNvCxnSpPr>
-                <a:stCxn id="7" idx="2"/>
-                <a:endCxn id="8" idx="0"/>
-              </p:cNvCxnSpPr>
-              <p:nvPr/>
-            </p:nvCxnSpPr>
-            <p:spPr>
-              <a:xfrm rot="5400000">
-                <a:off x="5791081" y="1273815"/>
-                <a:ext cx="514166" cy="792088"/>
-              </a:xfrm>
-              <a:prstGeom prst="bentConnector3">
-                <a:avLst/>
-              </a:prstGeom>
-              <a:ln w="12700">
+              </a:solidFill>
+            </a:endParaRPr>
+          </a:p>
+        </p:txBody>
+      </p:sp>
+      <p:cxnSp>
+        <p:nvCxnSpPr>
+          <p:cNvPr id="44" name="직선 연결선 43"/>
+          <p:cNvCxnSpPr>
+            <a:stCxn id="5" idx="0"/>
+            <a:endCxn id="42" idx="2"/>
+          </p:cNvCxnSpPr>
+          <p:nvPr/>
+        </p:nvCxnSpPr>
+        <p:spPr>
+          <a:xfrm flipV="1">
+            <a:off x="3470777" y="1848893"/>
+            <a:ext cx="0" cy="161783"/>
+          </a:xfrm>
+          <a:prstGeom prst="line">
+            <a:avLst/>
+          </a:prstGeom>
+          <a:ln w="12700">
+            <a:solidFill>
+              <a:schemeClr val="tx1"/>
+            </a:solidFill>
+          </a:ln>
+        </p:spPr>
+        <p:style>
+          <a:lnRef idx="1">
+            <a:schemeClr val="accent1"/>
+          </a:lnRef>
+          <a:fillRef idx="0">
+            <a:schemeClr val="accent1"/>
+          </a:fillRef>
+          <a:effectRef idx="0">
+            <a:schemeClr val="accent1"/>
+          </a:effectRef>
+          <a:fontRef idx="minor">
+            <a:schemeClr val="tx1"/>
+          </a:fontRef>
+        </p:style>
+      </p:cxnSp>
+      <p:sp>
+        <p:nvSpPr>
+          <p:cNvPr id="19" name="모서리가 둥근 직사각형 18"/>
+          <p:cNvSpPr/>
+          <p:nvPr/>
+        </p:nvSpPr>
+        <p:spPr>
+          <a:xfrm>
+            <a:off x="1474836" y="3698919"/>
+            <a:ext cx="5689452" cy="1394531"/>
+          </a:xfrm>
+          <a:prstGeom prst="roundRect">
+            <a:avLst/>
+          </a:prstGeom>
+          <a:noFill/>
+          <a:ln>
+            <a:solidFill>
+              <a:schemeClr val="accent6">
+                <a:lumMod val="75000"/>
+              </a:schemeClr>
+            </a:solidFill>
+          </a:ln>
+        </p:spPr>
+        <p:style>
+          <a:lnRef idx="2">
+            <a:schemeClr val="accent1">
+              <a:shade val="50000"/>
+            </a:schemeClr>
+          </a:lnRef>
+          <a:fillRef idx="1">
+            <a:schemeClr val="accent1"/>
+          </a:fillRef>
+          <a:effectRef idx="0">
+            <a:schemeClr val="accent1"/>
+          </a:effectRef>
+          <a:fontRef idx="minor">
+            <a:schemeClr val="lt1"/>
+          </a:fontRef>
+        </p:style>
+        <p:txBody>
+          <a:bodyPr rtlCol="0" anchor="ctr"/>
+          <a:lstStyle/>
+          <a:p>
+            <a:pPr algn="ctr"/>
+            <a:endParaRPr lang="en-US" altLang="ko-KR" sz="1200" dirty="0" smtClean="0">
+              <a:solidFill>
+                <a:schemeClr val="tx1"/>
+              </a:solidFill>
+            </a:endParaRPr>
+          </a:p>
+          <a:p>
+            <a:pPr algn="ctr"/>
+            <a:endParaRPr lang="en-US" altLang="ko-KR" sz="1200" dirty="0">
+              <a:solidFill>
+                <a:schemeClr val="tx1"/>
+              </a:solidFill>
+            </a:endParaRPr>
+          </a:p>
+          <a:p>
+            <a:pPr algn="ctr"/>
+            <a:endParaRPr lang="en-US" altLang="ko-KR" sz="1200" dirty="0" smtClean="0">
+              <a:solidFill>
+                <a:schemeClr val="tx1"/>
+              </a:solidFill>
+            </a:endParaRPr>
+          </a:p>
+          <a:p>
+            <a:pPr algn="ctr"/>
+            <a:endParaRPr lang="en-US" altLang="ko-KR" sz="1200" dirty="0">
+              <a:solidFill>
+                <a:schemeClr val="tx1"/>
+              </a:solidFill>
+            </a:endParaRPr>
+          </a:p>
+          <a:p>
+            <a:pPr algn="ctr"/>
+            <a:endParaRPr lang="en-US" altLang="ko-KR" sz="1200" dirty="0">
+              <a:solidFill>
+                <a:schemeClr val="tx1"/>
+              </a:solidFill>
+            </a:endParaRPr>
+          </a:p>
+          <a:p>
+            <a:pPr algn="r"/>
+            <a:r>
+              <a:rPr lang="en-US" altLang="ko-KR" sz="1200" dirty="0" err="1" smtClean="0">
                 <a:solidFill>
                   <a:schemeClr val="tx1"/>
                 </a:solidFill>
-              </a:ln>
-            </p:spPr>
-            <p:style>
-              <a:lnRef idx="1">
-                <a:schemeClr val="accent1"/>
-              </a:lnRef>
-              <a:fillRef idx="0">
-                <a:schemeClr val="accent1"/>
-              </a:fillRef>
-              <a:effectRef idx="0">
-                <a:schemeClr val="accent1"/>
-              </a:effectRef>
-              <a:fontRef idx="minor">
-                <a:schemeClr val="tx1"/>
-              </a:fontRef>
-            </p:style>
-          </p:cxnSp>
-          <p:sp>
-            <p:nvSpPr>
-              <p:cNvPr id="14" name="모서리가 둥근 직사각형 13"/>
-              <p:cNvSpPr/>
-              <p:nvPr/>
-            </p:nvSpPr>
-            <p:spPr>
-              <a:xfrm>
-                <a:off x="2569569" y="421604"/>
-                <a:ext cx="1440160" cy="363640"/>
-              </a:xfrm>
-              <a:prstGeom prst="roundRect">
-                <a:avLst/>
-              </a:prstGeom>
-              <a:solidFill>
-                <a:schemeClr val="accent6">
-                  <a:lumMod val="75000"/>
-                </a:schemeClr>
-              </a:solidFill>
-              <a:ln>
-                <a:noFill/>
-              </a:ln>
-            </p:spPr>
-            <p:style>
-              <a:lnRef idx="2">
-                <a:schemeClr val="accent1">
-                  <a:shade val="50000"/>
-                </a:schemeClr>
-              </a:lnRef>
-              <a:fillRef idx="1">
-                <a:schemeClr val="accent1"/>
-              </a:fillRef>
-              <a:effectRef idx="0">
-                <a:schemeClr val="accent1"/>
-              </a:effectRef>
-              <a:fontRef idx="minor">
-                <a:schemeClr val="lt1"/>
-              </a:fontRef>
-            </p:style>
-            <p:txBody>
-              <a:bodyPr rtlCol="0" anchor="ctr"/>
-              <a:lstStyle/>
-              <a:p>
-                <a:pPr algn="ctr"/>
-                <a:r>
-                  <a:rPr lang="en-US" altLang="ko-KR" sz="1200" dirty="0" err="1" smtClean="0"/>
-                  <a:t>imgtrans</a:t>
-                </a:r>
-                <a:endParaRPr lang="ko-KR" altLang="en-US" sz="1200" dirty="0"/>
-              </a:p>
-            </p:txBody>
-          </p:sp>
-          <p:cxnSp>
-            <p:nvCxnSpPr>
-              <p:cNvPr id="15" name="직선 연결선 14"/>
-              <p:cNvCxnSpPr>
-                <a:stCxn id="5" idx="1"/>
-                <a:endCxn id="14" idx="3"/>
-              </p:cNvCxnSpPr>
-              <p:nvPr/>
-            </p:nvCxnSpPr>
-            <p:spPr>
-              <a:xfrm flipH="1">
-                <a:off x="4009729" y="600708"/>
-                <a:ext cx="922311" cy="2716"/>
-              </a:xfrm>
-              <a:prstGeom prst="line">
-                <a:avLst/>
-              </a:prstGeom>
-              <a:ln w="12700">
+              </a:rPr>
+              <a:t>dino</a:t>
+            </a:r>
+            <a:r>
+              <a:rPr lang="en-US" altLang="ko-KR" sz="1200" dirty="0" err="1" smtClean="0">
                 <a:solidFill>
                   <a:schemeClr val="tx1"/>
                 </a:solidFill>
-              </a:ln>
-            </p:spPr>
-            <p:style>
-              <a:lnRef idx="1">
-                <a:schemeClr val="accent1"/>
-              </a:lnRef>
-              <a:fillRef idx="0">
-                <a:schemeClr val="accent1"/>
-              </a:fillRef>
-              <a:effectRef idx="0">
-                <a:schemeClr val="accent1"/>
-              </a:effectRef>
-              <a:fontRef idx="minor">
-                <a:schemeClr val="tx1"/>
-              </a:fontRef>
-            </p:style>
-          </p:cxnSp>
-          <p:cxnSp>
-            <p:nvCxnSpPr>
-              <p:cNvPr id="16" name="직선 연결선 15"/>
-              <p:cNvCxnSpPr>
-                <a:stCxn id="5" idx="3"/>
-                <a:endCxn id="9" idx="1"/>
-              </p:cNvCxnSpPr>
-              <p:nvPr/>
-            </p:nvCxnSpPr>
-            <p:spPr>
-              <a:xfrm flipV="1">
-                <a:off x="6372200" y="600707"/>
-                <a:ext cx="1008112" cy="1"/>
-              </a:xfrm>
-              <a:prstGeom prst="line">
-                <a:avLst/>
-              </a:prstGeom>
-              <a:ln w="12700">
+              </a:rPr>
+              <a:t>proc</a:t>
+            </a:r>
+            <a:r>
+              <a:rPr lang="en-US" altLang="ko-KR" sz="1200" dirty="0" smtClean="0">
                 <a:solidFill>
                   <a:schemeClr val="tx1"/>
                 </a:solidFill>
-              </a:ln>
-            </p:spPr>
-            <p:style>
-              <a:lnRef idx="1">
-                <a:schemeClr val="accent1"/>
-              </a:lnRef>
-              <a:fillRef idx="0">
-                <a:schemeClr val="accent1"/>
-              </a:fillRef>
-              <a:effectRef idx="0">
-                <a:schemeClr val="accent1"/>
-              </a:effectRef>
-              <a:fontRef idx="minor">
+              </a:rPr>
+              <a:t>.</a:t>
+            </a:r>
+            <a:endParaRPr lang="en-US" altLang="ko-KR" sz="1200" dirty="0" smtClean="0">
+              <a:solidFill>
                 <a:schemeClr val="tx1"/>
-              </a:fontRef>
-            </p:style>
-          </p:cxnSp>
-          <p:sp>
-            <p:nvSpPr>
-              <p:cNvPr id="17" name="모서리가 둥근 직사각형 16"/>
-              <p:cNvSpPr/>
-              <p:nvPr/>
-            </p:nvSpPr>
-            <p:spPr>
-              <a:xfrm>
-                <a:off x="2339752" y="260648"/>
-                <a:ext cx="6624736" cy="2160240"/>
-              </a:xfrm>
-              <a:prstGeom prst="roundRect">
-                <a:avLst/>
-              </a:prstGeom>
-              <a:noFill/>
-              <a:ln>
-                <a:solidFill>
-                  <a:schemeClr val="accent6">
-                    <a:lumMod val="75000"/>
-                  </a:schemeClr>
-                </a:solidFill>
-              </a:ln>
-            </p:spPr>
-            <p:style>
-              <a:lnRef idx="2">
-                <a:schemeClr val="accent1">
-                  <a:shade val="50000"/>
-                </a:schemeClr>
-              </a:lnRef>
-              <a:fillRef idx="1">
-                <a:schemeClr val="accent1"/>
-              </a:fillRef>
-              <a:effectRef idx="0">
-                <a:schemeClr val="accent1"/>
-              </a:effectRef>
-              <a:fontRef idx="minor">
-                <a:schemeClr val="lt1"/>
-              </a:fontRef>
-            </p:style>
-            <p:txBody>
-              <a:bodyPr rtlCol="0" anchor="ctr"/>
-              <a:lstStyle/>
-              <a:p>
-                <a:pPr algn="r"/>
-                <a:endParaRPr lang="en-US" altLang="ko-KR" sz="1200" dirty="0" smtClean="0">
-                  <a:solidFill>
-                    <a:schemeClr val="tx1"/>
-                  </a:solidFill>
-                </a:endParaRPr>
-              </a:p>
-              <a:p>
-                <a:pPr algn="r"/>
-                <a:endParaRPr lang="en-US" altLang="ko-KR" sz="1200" dirty="0">
-                  <a:solidFill>
-                    <a:schemeClr val="tx1"/>
-                  </a:solidFill>
-                </a:endParaRPr>
-              </a:p>
-              <a:p>
-                <a:pPr algn="r"/>
-                <a:endParaRPr lang="en-US" altLang="ko-KR" sz="1200" dirty="0" smtClean="0">
-                  <a:solidFill>
-                    <a:schemeClr val="tx1"/>
-                  </a:solidFill>
-                </a:endParaRPr>
-              </a:p>
-              <a:p>
-                <a:pPr algn="r"/>
-                <a:endParaRPr lang="en-US" altLang="ko-KR" sz="1200" dirty="0">
-                  <a:solidFill>
-                    <a:schemeClr val="tx1"/>
-                  </a:solidFill>
-                </a:endParaRPr>
-              </a:p>
-              <a:p>
-                <a:pPr algn="r"/>
-                <a:endParaRPr lang="en-US" altLang="ko-KR" sz="1200" dirty="0" smtClean="0">
-                  <a:solidFill>
-                    <a:schemeClr val="tx1"/>
-                  </a:solidFill>
-                </a:endParaRPr>
-              </a:p>
-              <a:p>
-                <a:pPr algn="r"/>
-                <a:endParaRPr lang="en-US" altLang="ko-KR" sz="1200" dirty="0" smtClean="0">
-                  <a:solidFill>
-                    <a:schemeClr val="tx1"/>
-                  </a:solidFill>
-                </a:endParaRPr>
-              </a:p>
-              <a:p>
-                <a:pPr algn="r"/>
-                <a:r>
-                  <a:rPr lang="en-US" altLang="ko-KR" sz="1200" dirty="0" smtClean="0">
-                    <a:solidFill>
-                      <a:schemeClr val="tx1"/>
-                    </a:solidFill>
-                  </a:rPr>
-                  <a:t>core</a:t>
-                </a:r>
-              </a:p>
-            </p:txBody>
-          </p:sp>
-        </p:grpSp>
-        <p:grpSp>
-          <p:nvGrpSpPr>
-            <p:cNvPr id="18" name="그룹 17"/>
-            <p:cNvGrpSpPr/>
-            <p:nvPr/>
-          </p:nvGrpSpPr>
-          <p:grpSpPr>
-            <a:xfrm>
-              <a:off x="2339752" y="3573016"/>
-              <a:ext cx="6624736" cy="3254969"/>
-              <a:chOff x="2339752" y="3573016"/>
-              <a:chExt cx="6624736" cy="3254969"/>
-            </a:xfrm>
-          </p:grpSpPr>
-          <p:sp>
-            <p:nvSpPr>
-              <p:cNvPr id="19" name="모서리가 둥근 직사각형 18"/>
-              <p:cNvSpPr/>
-              <p:nvPr/>
-            </p:nvSpPr>
-            <p:spPr>
-              <a:xfrm>
-                <a:off x="2339752" y="3832002"/>
-                <a:ext cx="6624736" cy="2995983"/>
-              </a:xfrm>
-              <a:prstGeom prst="roundRect">
-                <a:avLst/>
-              </a:prstGeom>
-              <a:noFill/>
-              <a:ln>
-                <a:solidFill>
-                  <a:schemeClr val="accent6">
-                    <a:lumMod val="75000"/>
-                  </a:schemeClr>
-                </a:solidFill>
-              </a:ln>
-            </p:spPr>
-            <p:style>
-              <a:lnRef idx="2">
-                <a:schemeClr val="accent1">
-                  <a:shade val="50000"/>
-                </a:schemeClr>
-              </a:lnRef>
-              <a:fillRef idx="1">
-                <a:schemeClr val="accent1"/>
-              </a:fillRef>
-              <a:effectRef idx="0">
-                <a:schemeClr val="accent1"/>
-              </a:effectRef>
-              <a:fontRef idx="minor">
-                <a:schemeClr val="lt1"/>
-              </a:fontRef>
-            </p:style>
-            <p:txBody>
-              <a:bodyPr rtlCol="0" anchor="ctr"/>
-              <a:lstStyle/>
-              <a:p>
-                <a:pPr algn="ctr"/>
-                <a:endParaRPr lang="en-US" altLang="ko-KR" sz="1200" dirty="0" smtClean="0">
-                  <a:solidFill>
-                    <a:schemeClr val="tx1"/>
-                  </a:solidFill>
-                </a:endParaRPr>
-              </a:p>
-              <a:p>
-                <a:pPr algn="ctr"/>
-                <a:endParaRPr lang="en-US" altLang="ko-KR" sz="1200" dirty="0">
-                  <a:solidFill>
-                    <a:schemeClr val="tx1"/>
-                  </a:solidFill>
-                </a:endParaRPr>
-              </a:p>
-              <a:p>
-                <a:pPr algn="ctr"/>
-                <a:endParaRPr lang="en-US" altLang="ko-KR" sz="1200" dirty="0" smtClean="0">
-                  <a:solidFill>
-                    <a:schemeClr val="tx1"/>
-                  </a:solidFill>
-                </a:endParaRPr>
-              </a:p>
-              <a:p>
-                <a:pPr algn="ctr"/>
-                <a:endParaRPr lang="en-US" altLang="ko-KR" sz="1200" dirty="0">
-                  <a:solidFill>
-                    <a:schemeClr val="tx1"/>
-                  </a:solidFill>
-                </a:endParaRPr>
-              </a:p>
-              <a:p>
-                <a:pPr algn="ctr"/>
-                <a:endParaRPr lang="en-US" altLang="ko-KR" sz="1200" dirty="0" smtClean="0">
-                  <a:solidFill>
-                    <a:schemeClr val="tx1"/>
-                  </a:solidFill>
-                </a:endParaRPr>
-              </a:p>
-              <a:p>
-                <a:pPr algn="ctr"/>
-                <a:endParaRPr lang="en-US" altLang="ko-KR" sz="1200" dirty="0">
-                  <a:solidFill>
-                    <a:schemeClr val="tx1"/>
-                  </a:solidFill>
-                </a:endParaRPr>
-              </a:p>
-              <a:p>
-                <a:pPr algn="ctr"/>
-                <a:endParaRPr lang="en-US" altLang="ko-KR" sz="1200" dirty="0" smtClean="0">
-                  <a:solidFill>
-                    <a:schemeClr val="tx1"/>
-                  </a:solidFill>
-                </a:endParaRPr>
-              </a:p>
-              <a:p>
-                <a:pPr algn="ctr"/>
-                <a:endParaRPr lang="en-US" altLang="ko-KR" sz="1200" dirty="0">
-                  <a:solidFill>
-                    <a:schemeClr val="tx1"/>
-                  </a:solidFill>
-                </a:endParaRPr>
-              </a:p>
-              <a:p>
-                <a:pPr algn="ctr"/>
-                <a:endParaRPr lang="en-US" altLang="ko-KR" sz="1200" dirty="0">
-                  <a:solidFill>
-                    <a:schemeClr val="tx1"/>
-                  </a:solidFill>
-                </a:endParaRPr>
-              </a:p>
-              <a:p>
-                <a:pPr algn="r"/>
-                <a:r>
-                  <a:rPr lang="en-US" altLang="ko-KR" sz="1200" dirty="0" err="1">
-                    <a:solidFill>
-                      <a:schemeClr val="tx1"/>
-                    </a:solidFill>
-                  </a:rPr>
-                  <a:t>i</a:t>
-                </a:r>
-                <a:r>
-                  <a:rPr lang="en-US" altLang="ko-KR" sz="1200" dirty="0" err="1" smtClean="0">
-                    <a:solidFill>
-                      <a:schemeClr val="tx1"/>
-                    </a:solidFill>
-                  </a:rPr>
-                  <a:t>mgproc</a:t>
-                </a:r>
-                <a:endParaRPr lang="en-US" altLang="ko-KR" sz="1200" dirty="0" smtClean="0">
-                  <a:solidFill>
-                    <a:schemeClr val="tx1"/>
-                  </a:solidFill>
-                </a:endParaRPr>
-              </a:p>
-            </p:txBody>
-          </p:sp>
-          <p:sp>
-            <p:nvSpPr>
-              <p:cNvPr id="20" name="모서리가 둥근 직사각형 19"/>
-              <p:cNvSpPr/>
-              <p:nvPr/>
-            </p:nvSpPr>
-            <p:spPr>
-              <a:xfrm>
-                <a:off x="3040836" y="3948659"/>
-                <a:ext cx="1440160" cy="360040"/>
-              </a:xfrm>
-              <a:prstGeom prst="roundRect">
-                <a:avLst/>
-              </a:prstGeom>
-              <a:solidFill>
-                <a:schemeClr val="accent6">
-                  <a:lumMod val="75000"/>
-                </a:schemeClr>
               </a:solidFill>
-              <a:ln>
-                <a:noFill/>
-              </a:ln>
-            </p:spPr>
-            <p:style>
-              <a:lnRef idx="2">
-                <a:schemeClr val="accent1">
-                  <a:shade val="50000"/>
-                </a:schemeClr>
-              </a:lnRef>
-              <a:fillRef idx="1">
-                <a:schemeClr val="accent1"/>
-              </a:fillRef>
-              <a:effectRef idx="0">
-                <a:schemeClr val="accent1"/>
-              </a:effectRef>
-              <a:fontRef idx="minor">
-                <a:schemeClr val="lt1"/>
-              </a:fontRef>
-            </p:style>
-            <p:txBody>
-              <a:bodyPr rtlCol="0" anchor="ctr"/>
-              <a:lstStyle/>
-              <a:p>
-                <a:pPr algn="ctr"/>
-                <a:r>
-                  <a:rPr lang="en-US" altLang="ko-KR" sz="1100" dirty="0" err="1" smtClean="0"/>
-                  <a:t>binarization</a:t>
-                </a:r>
-                <a:endParaRPr lang="ko-KR" altLang="en-US" sz="1100" dirty="0"/>
-              </a:p>
-            </p:txBody>
-          </p:sp>
-          <p:sp>
-            <p:nvSpPr>
-              <p:cNvPr id="21" name="모서리가 둥근 직사각형 20"/>
-              <p:cNvSpPr/>
-              <p:nvPr/>
-            </p:nvSpPr>
-            <p:spPr>
-              <a:xfrm>
-                <a:off x="3040836" y="4518740"/>
-                <a:ext cx="1440160" cy="360040"/>
-              </a:xfrm>
-              <a:prstGeom prst="roundRect">
-                <a:avLst/>
-              </a:prstGeom>
-              <a:solidFill>
-                <a:schemeClr val="accent6">
-                  <a:lumMod val="75000"/>
-                </a:schemeClr>
-              </a:solidFill>
-              <a:ln>
-                <a:noFill/>
-              </a:ln>
-            </p:spPr>
-            <p:style>
-              <a:lnRef idx="2">
-                <a:schemeClr val="accent1">
-                  <a:shade val="50000"/>
-                </a:schemeClr>
-              </a:lnRef>
-              <a:fillRef idx="1">
-                <a:schemeClr val="accent1"/>
-              </a:fillRef>
-              <a:effectRef idx="0">
-                <a:schemeClr val="accent1"/>
-              </a:effectRef>
-              <a:fontRef idx="minor">
-                <a:schemeClr val="lt1"/>
-              </a:fontRef>
-            </p:style>
-            <p:txBody>
-              <a:bodyPr rtlCol="0" anchor="ctr"/>
-              <a:lstStyle/>
-              <a:p>
-                <a:pPr algn="ctr"/>
-                <a:r>
-                  <a:rPr lang="en-US" altLang="ko-KR" sz="1100" dirty="0" err="1" smtClean="0"/>
-                  <a:t>cannyedge</a:t>
-                </a:r>
-                <a:endParaRPr lang="ko-KR" altLang="en-US" sz="1100" dirty="0"/>
-              </a:p>
-            </p:txBody>
-          </p:sp>
-          <p:sp>
-            <p:nvSpPr>
-              <p:cNvPr id="22" name="모서리가 둥근 직사각형 21"/>
-              <p:cNvSpPr/>
-              <p:nvPr/>
-            </p:nvSpPr>
-            <p:spPr>
-              <a:xfrm>
-                <a:off x="4876799" y="4524475"/>
-                <a:ext cx="1440160" cy="360040"/>
-              </a:xfrm>
-              <a:prstGeom prst="roundRect">
-                <a:avLst/>
-              </a:prstGeom>
-              <a:solidFill>
-                <a:schemeClr val="accent5">
-                  <a:lumMod val="75000"/>
-                </a:schemeClr>
-              </a:solidFill>
-              <a:ln>
-                <a:noFill/>
-              </a:ln>
-            </p:spPr>
-            <p:style>
-              <a:lnRef idx="2">
-                <a:schemeClr val="accent1">
-                  <a:shade val="50000"/>
-                </a:schemeClr>
-              </a:lnRef>
-              <a:fillRef idx="1">
-                <a:schemeClr val="accent1"/>
-              </a:fillRef>
-              <a:effectRef idx="0">
-                <a:schemeClr val="accent1"/>
-              </a:effectRef>
-              <a:fontRef idx="minor">
-                <a:schemeClr val="lt1"/>
-              </a:fontRef>
-            </p:style>
-            <p:txBody>
-              <a:bodyPr rtlCol="0" anchor="ctr"/>
-              <a:lstStyle/>
-              <a:p>
-                <a:pPr algn="ctr"/>
-                <a:r>
-                  <a:rPr lang="en-US" altLang="ko-KR" sz="1100" dirty="0" err="1" smtClean="0"/>
-                  <a:t>chaincode</a:t>
-                </a:r>
-                <a:endParaRPr lang="ko-KR" altLang="en-US" sz="1100" dirty="0"/>
-              </a:p>
-            </p:txBody>
-          </p:sp>
-          <p:sp>
-            <p:nvSpPr>
-              <p:cNvPr id="23" name="모서리가 둥근 직사각형 22"/>
-              <p:cNvSpPr/>
-              <p:nvPr/>
-            </p:nvSpPr>
-            <p:spPr>
-              <a:xfrm>
-                <a:off x="4876799" y="6251922"/>
-                <a:ext cx="1440160" cy="360040"/>
-              </a:xfrm>
-              <a:prstGeom prst="roundRect">
-                <a:avLst/>
-              </a:prstGeom>
-              <a:solidFill>
-                <a:schemeClr val="accent5">
-                  <a:lumMod val="75000"/>
-                </a:schemeClr>
-              </a:solidFill>
-              <a:ln>
-                <a:noFill/>
-              </a:ln>
-            </p:spPr>
-            <p:style>
-              <a:lnRef idx="2">
-                <a:schemeClr val="accent1">
-                  <a:shade val="50000"/>
-                </a:schemeClr>
-              </a:lnRef>
-              <a:fillRef idx="1">
-                <a:schemeClr val="accent1"/>
-              </a:fillRef>
-              <a:effectRef idx="0">
-                <a:schemeClr val="accent1"/>
-              </a:effectRef>
-              <a:fontRef idx="minor">
-                <a:schemeClr val="lt1"/>
-              </a:fontRef>
-            </p:style>
-            <p:txBody>
-              <a:bodyPr rtlCol="0" anchor="ctr"/>
-              <a:lstStyle/>
-              <a:p>
-                <a:pPr algn="ctr"/>
-                <a:r>
-                  <a:rPr lang="en-US" altLang="ko-KR" sz="1100" dirty="0" smtClean="0"/>
-                  <a:t>conversion</a:t>
-                </a:r>
-                <a:endParaRPr lang="ko-KR" altLang="en-US" sz="1100" dirty="0"/>
-              </a:p>
-            </p:txBody>
-          </p:sp>
-          <p:sp>
-            <p:nvSpPr>
-              <p:cNvPr id="24" name="모서리가 둥근 직사각형 23"/>
-              <p:cNvSpPr/>
-              <p:nvPr/>
-            </p:nvSpPr>
-            <p:spPr>
-              <a:xfrm>
-                <a:off x="4876799" y="5100291"/>
-                <a:ext cx="1440160" cy="360040"/>
-              </a:xfrm>
-              <a:prstGeom prst="roundRect">
-                <a:avLst/>
-              </a:prstGeom>
-              <a:solidFill>
-                <a:schemeClr val="accent6">
-                  <a:lumMod val="75000"/>
-                </a:schemeClr>
-              </a:solidFill>
-              <a:ln>
-                <a:noFill/>
-              </a:ln>
-            </p:spPr>
-            <p:style>
-              <a:lnRef idx="2">
-                <a:schemeClr val="accent1">
-                  <a:shade val="50000"/>
-                </a:schemeClr>
-              </a:lnRef>
-              <a:fillRef idx="1">
-                <a:schemeClr val="accent1"/>
-              </a:fillRef>
-              <a:effectRef idx="0">
-                <a:schemeClr val="accent1"/>
-              </a:effectRef>
-              <a:fontRef idx="minor">
-                <a:schemeClr val="lt1"/>
-              </a:fontRef>
-            </p:style>
-            <p:txBody>
-              <a:bodyPr rtlCol="0" anchor="ctr"/>
-              <a:lstStyle/>
-              <a:p>
-                <a:pPr algn="ctr"/>
-                <a:r>
-                  <a:rPr lang="en-US" altLang="ko-KR" sz="1100" dirty="0" err="1" smtClean="0"/>
-                  <a:t>convexhull</a:t>
-                </a:r>
-                <a:endParaRPr lang="ko-KR" altLang="en-US" sz="1100" dirty="0"/>
-              </a:p>
-            </p:txBody>
-          </p:sp>
-          <p:sp>
-            <p:nvSpPr>
-              <p:cNvPr id="25" name="모서리가 둥근 직사각형 24"/>
-              <p:cNvSpPr/>
-              <p:nvPr/>
-            </p:nvSpPr>
-            <p:spPr>
-              <a:xfrm>
-                <a:off x="3040836" y="5088821"/>
-                <a:ext cx="1440160" cy="360040"/>
-              </a:xfrm>
-              <a:prstGeom prst="roundRect">
-                <a:avLst/>
-              </a:prstGeom>
-              <a:solidFill>
-                <a:schemeClr val="accent6">
-                  <a:lumMod val="75000"/>
-                </a:schemeClr>
-              </a:solidFill>
-              <a:ln>
-                <a:noFill/>
-              </a:ln>
-            </p:spPr>
-            <p:style>
-              <a:lnRef idx="2">
-                <a:schemeClr val="accent1">
-                  <a:shade val="50000"/>
-                </a:schemeClr>
-              </a:lnRef>
-              <a:fillRef idx="1">
-                <a:schemeClr val="accent1"/>
-              </a:fillRef>
-              <a:effectRef idx="0">
-                <a:schemeClr val="accent1"/>
-              </a:effectRef>
-              <a:fontRef idx="minor">
-                <a:schemeClr val="lt1"/>
-              </a:fontRef>
-            </p:style>
-            <p:txBody>
-              <a:bodyPr rtlCol="0" anchor="ctr"/>
-              <a:lstStyle/>
-              <a:p>
-                <a:pPr algn="ctr"/>
-                <a:r>
-                  <a:rPr lang="en-US" altLang="ko-KR" sz="1100" dirty="0" err="1" smtClean="0"/>
-                  <a:t>dp</a:t>
-                </a:r>
-                <a:endParaRPr lang="ko-KR" altLang="en-US" sz="1100" dirty="0"/>
-              </a:p>
-            </p:txBody>
-          </p:sp>
-          <p:sp>
-            <p:nvSpPr>
-              <p:cNvPr id="26" name="모서리가 둥근 직사각형 25"/>
-              <p:cNvSpPr/>
-              <p:nvPr/>
-            </p:nvSpPr>
-            <p:spPr>
-              <a:xfrm>
-                <a:off x="3040836" y="5658902"/>
-                <a:ext cx="1440160" cy="360040"/>
-              </a:xfrm>
-              <a:prstGeom prst="roundRect">
-                <a:avLst/>
-              </a:prstGeom>
-              <a:solidFill>
-                <a:schemeClr val="accent6">
-                  <a:lumMod val="75000"/>
-                </a:schemeClr>
-              </a:solidFill>
-              <a:ln>
-                <a:noFill/>
-              </a:ln>
-            </p:spPr>
-            <p:style>
-              <a:lnRef idx="2">
-                <a:schemeClr val="accent1">
-                  <a:shade val="50000"/>
-                </a:schemeClr>
-              </a:lnRef>
-              <a:fillRef idx="1">
-                <a:schemeClr val="accent1"/>
-              </a:fillRef>
-              <a:effectRef idx="0">
-                <a:schemeClr val="accent1"/>
-              </a:effectRef>
-              <a:fontRef idx="minor">
-                <a:schemeClr val="lt1"/>
-              </a:fontRef>
-            </p:style>
-            <p:txBody>
-              <a:bodyPr rtlCol="0" anchor="ctr"/>
-              <a:lstStyle/>
-              <a:p>
-                <a:pPr algn="ctr"/>
-                <a:r>
-                  <a:rPr lang="en-US" altLang="ko-KR" sz="1100" dirty="0" smtClean="0"/>
-                  <a:t>feature</a:t>
-                </a:r>
-                <a:endParaRPr lang="ko-KR" altLang="en-US" sz="1100" dirty="0"/>
-              </a:p>
-            </p:txBody>
-          </p:sp>
-          <p:sp>
-            <p:nvSpPr>
-              <p:cNvPr id="27" name="모서리가 둥근 직사각형 26"/>
-              <p:cNvSpPr/>
-              <p:nvPr/>
-            </p:nvSpPr>
-            <p:spPr>
-              <a:xfrm>
-                <a:off x="4876799" y="5676107"/>
-                <a:ext cx="1440160" cy="360040"/>
-              </a:xfrm>
-              <a:prstGeom prst="roundRect">
-                <a:avLst/>
-              </a:prstGeom>
-              <a:solidFill>
-                <a:schemeClr val="accent6">
-                  <a:lumMod val="75000"/>
-                </a:schemeClr>
-              </a:solidFill>
-              <a:ln>
-                <a:noFill/>
-              </a:ln>
-            </p:spPr>
-            <p:style>
-              <a:lnRef idx="2">
-                <a:schemeClr val="accent1">
-                  <a:shade val="50000"/>
-                </a:schemeClr>
-              </a:lnRef>
-              <a:fillRef idx="1">
-                <a:schemeClr val="accent1"/>
-              </a:fillRef>
-              <a:effectRef idx="0">
-                <a:schemeClr val="accent1"/>
-              </a:effectRef>
-              <a:fontRef idx="minor">
-                <a:schemeClr val="lt1"/>
-              </a:fontRef>
-            </p:style>
-            <p:txBody>
-              <a:bodyPr rtlCol="0" anchor="ctr"/>
-              <a:lstStyle/>
-              <a:p>
-                <a:pPr algn="ctr"/>
-                <a:r>
-                  <a:rPr lang="en-US" altLang="ko-KR" sz="1100" dirty="0" smtClean="0"/>
-                  <a:t>filter</a:t>
-                </a:r>
-                <a:endParaRPr lang="ko-KR" altLang="en-US" sz="1100" dirty="0"/>
-              </a:p>
-            </p:txBody>
-          </p:sp>
-          <p:sp>
-            <p:nvSpPr>
-              <p:cNvPr id="28" name="모서리가 둥근 직사각형 27"/>
-              <p:cNvSpPr/>
-              <p:nvPr/>
-            </p:nvSpPr>
-            <p:spPr>
-              <a:xfrm>
-                <a:off x="4876799" y="3948659"/>
-                <a:ext cx="1440160" cy="360040"/>
-              </a:xfrm>
-              <a:prstGeom prst="roundRect">
-                <a:avLst/>
-              </a:prstGeom>
-              <a:solidFill>
-                <a:schemeClr val="bg1">
-                  <a:lumMod val="65000"/>
-                </a:schemeClr>
-              </a:solidFill>
-              <a:ln>
-                <a:noFill/>
-              </a:ln>
-            </p:spPr>
-            <p:style>
-              <a:lnRef idx="2">
-                <a:schemeClr val="accent1">
-                  <a:shade val="50000"/>
-                </a:schemeClr>
-              </a:lnRef>
-              <a:fillRef idx="1">
-                <a:schemeClr val="accent1"/>
-              </a:fillRef>
-              <a:effectRef idx="0">
-                <a:schemeClr val="accent1"/>
-              </a:effectRef>
-              <a:fontRef idx="minor">
-                <a:schemeClr val="lt1"/>
-              </a:fontRef>
-            </p:style>
-            <p:txBody>
-              <a:bodyPr rtlCol="0" anchor="ctr"/>
-              <a:lstStyle/>
-              <a:p>
-                <a:pPr algn="ctr"/>
-                <a:r>
-                  <a:rPr lang="en-US" altLang="ko-KR" sz="1100" dirty="0" smtClean="0"/>
-                  <a:t>histogram</a:t>
-                </a:r>
-                <a:endParaRPr lang="ko-KR" altLang="en-US" sz="1100" dirty="0"/>
-              </a:p>
-            </p:txBody>
-          </p:sp>
-          <p:sp>
-            <p:nvSpPr>
-              <p:cNvPr id="29" name="모서리가 둥근 직사각형 28"/>
-              <p:cNvSpPr/>
-              <p:nvPr/>
-            </p:nvSpPr>
-            <p:spPr>
-              <a:xfrm>
-                <a:off x="6601053" y="4518740"/>
-                <a:ext cx="1440160" cy="360040"/>
-              </a:xfrm>
-              <a:prstGeom prst="roundRect">
-                <a:avLst/>
-              </a:prstGeom>
-              <a:solidFill>
-                <a:schemeClr val="accent6">
-                  <a:lumMod val="75000"/>
-                </a:schemeClr>
-              </a:solidFill>
-              <a:ln>
-                <a:noFill/>
-              </a:ln>
-            </p:spPr>
-            <p:style>
-              <a:lnRef idx="2">
-                <a:schemeClr val="accent1">
-                  <a:shade val="50000"/>
-                </a:schemeClr>
-              </a:lnRef>
-              <a:fillRef idx="1">
-                <a:schemeClr val="accent1"/>
-              </a:fillRef>
-              <a:effectRef idx="0">
-                <a:schemeClr val="accent1"/>
-              </a:effectRef>
-              <a:fontRef idx="minor">
-                <a:schemeClr val="lt1"/>
-              </a:fontRef>
-            </p:style>
-            <p:txBody>
-              <a:bodyPr rtlCol="0" anchor="ctr"/>
-              <a:lstStyle/>
-              <a:p>
-                <a:pPr algn="ctr"/>
-                <a:r>
-                  <a:rPr lang="en-US" altLang="ko-KR" sz="1100" dirty="0" smtClean="0"/>
-                  <a:t>labeling</a:t>
-                </a:r>
-                <a:endParaRPr lang="ko-KR" altLang="en-US" sz="1100" dirty="0"/>
-              </a:p>
-            </p:txBody>
-          </p:sp>
-          <p:sp>
-            <p:nvSpPr>
-              <p:cNvPr id="30" name="모서리가 둥근 직사각형 29"/>
-              <p:cNvSpPr/>
-              <p:nvPr/>
-            </p:nvSpPr>
-            <p:spPr>
-              <a:xfrm>
-                <a:off x="3040836" y="6228981"/>
-                <a:ext cx="1440160" cy="360040"/>
-              </a:xfrm>
-              <a:prstGeom prst="roundRect">
-                <a:avLst/>
-              </a:prstGeom>
-              <a:solidFill>
-                <a:schemeClr val="accent6">
-                  <a:lumMod val="75000"/>
-                </a:schemeClr>
-              </a:solidFill>
-              <a:ln>
-                <a:noFill/>
-              </a:ln>
-            </p:spPr>
-            <p:style>
-              <a:lnRef idx="2">
-                <a:schemeClr val="accent1">
-                  <a:shade val="50000"/>
-                </a:schemeClr>
-              </a:lnRef>
-              <a:fillRef idx="1">
-                <a:schemeClr val="accent1"/>
-              </a:fillRef>
-              <a:effectRef idx="0">
-                <a:schemeClr val="accent1"/>
-              </a:effectRef>
-              <a:fontRef idx="minor">
-                <a:schemeClr val="lt1"/>
-              </a:fontRef>
-            </p:style>
-            <p:txBody>
-              <a:bodyPr rtlCol="0" anchor="ctr"/>
-              <a:lstStyle/>
-              <a:p>
-                <a:pPr algn="ctr"/>
-                <a:r>
-                  <a:rPr lang="en-US" altLang="ko-KR" sz="1100" dirty="0" smtClean="0"/>
-                  <a:t>morphology</a:t>
-                </a:r>
-                <a:endParaRPr lang="ko-KR" altLang="en-US" sz="1100" dirty="0"/>
-              </a:p>
-            </p:txBody>
-          </p:sp>
-          <p:sp>
-            <p:nvSpPr>
-              <p:cNvPr id="31" name="모서리가 둥근 직사각형 30"/>
-              <p:cNvSpPr/>
-              <p:nvPr/>
-            </p:nvSpPr>
-            <p:spPr>
-              <a:xfrm>
-                <a:off x="6578362" y="3948659"/>
-                <a:ext cx="1440160" cy="360040"/>
-              </a:xfrm>
-              <a:prstGeom prst="roundRect">
-                <a:avLst/>
-              </a:prstGeom>
-              <a:solidFill>
-                <a:schemeClr val="accent5">
-                  <a:lumMod val="75000"/>
-                </a:schemeClr>
-              </a:solidFill>
-              <a:ln>
-                <a:noFill/>
-              </a:ln>
-            </p:spPr>
-            <p:style>
-              <a:lnRef idx="2">
-                <a:schemeClr val="accent1">
-                  <a:shade val="50000"/>
-                </a:schemeClr>
-              </a:lnRef>
-              <a:fillRef idx="1">
-                <a:schemeClr val="accent1"/>
-              </a:fillRef>
-              <a:effectRef idx="0">
-                <a:schemeClr val="accent1"/>
-              </a:effectRef>
-              <a:fontRef idx="minor">
-                <a:schemeClr val="lt1"/>
-              </a:fontRef>
-            </p:style>
-            <p:txBody>
-              <a:bodyPr rtlCol="0" anchor="ctr"/>
-              <a:lstStyle/>
-              <a:p>
-                <a:pPr algn="ctr"/>
-                <a:r>
-                  <a:rPr lang="en-US" altLang="ko-KR" sz="1100" dirty="0" smtClean="0"/>
-                  <a:t>resize</a:t>
-                </a:r>
-                <a:endParaRPr lang="ko-KR" altLang="en-US" sz="1100" dirty="0"/>
-              </a:p>
-            </p:txBody>
-          </p:sp>
-          <p:sp>
-            <p:nvSpPr>
-              <p:cNvPr id="32" name="모서리가 둥근 직사각형 31"/>
-              <p:cNvSpPr/>
-              <p:nvPr/>
-            </p:nvSpPr>
-            <p:spPr>
-              <a:xfrm>
-                <a:off x="6601053" y="5088821"/>
-                <a:ext cx="1440160" cy="360040"/>
-              </a:xfrm>
-              <a:prstGeom prst="roundRect">
-                <a:avLst/>
-              </a:prstGeom>
-              <a:solidFill>
-                <a:schemeClr val="accent6">
-                  <a:lumMod val="75000"/>
-                </a:schemeClr>
-              </a:solidFill>
-              <a:ln>
-                <a:noFill/>
-              </a:ln>
-            </p:spPr>
-            <p:style>
-              <a:lnRef idx="2">
-                <a:schemeClr val="accent1">
-                  <a:shade val="50000"/>
-                </a:schemeClr>
-              </a:lnRef>
-              <a:fillRef idx="1">
-                <a:schemeClr val="accent1"/>
-              </a:fillRef>
-              <a:effectRef idx="0">
-                <a:schemeClr val="accent1"/>
-              </a:effectRef>
-              <a:fontRef idx="minor">
-                <a:schemeClr val="lt1"/>
-              </a:fontRef>
-            </p:style>
-            <p:txBody>
-              <a:bodyPr rtlCol="0" anchor="ctr"/>
-              <a:lstStyle/>
-              <a:p>
-                <a:pPr algn="ctr"/>
-                <a:r>
-                  <a:rPr lang="en-US" altLang="ko-KR" sz="1100" dirty="0" smtClean="0"/>
-                  <a:t>thinning</a:t>
-                </a:r>
-                <a:endParaRPr lang="ko-KR" altLang="en-US" sz="1100" dirty="0"/>
-              </a:p>
-            </p:txBody>
-          </p:sp>
-          <p:cxnSp>
-            <p:nvCxnSpPr>
-              <p:cNvPr id="33" name="직선 연결선 32"/>
-              <p:cNvCxnSpPr>
-                <a:stCxn id="17" idx="2"/>
-                <a:endCxn id="19" idx="0"/>
-              </p:cNvCxnSpPr>
-              <p:nvPr/>
-            </p:nvCxnSpPr>
-            <p:spPr>
-              <a:xfrm>
-                <a:off x="5652120" y="3573016"/>
-                <a:ext cx="0" cy="258986"/>
-              </a:xfrm>
-              <a:prstGeom prst="line">
-                <a:avLst/>
-              </a:prstGeom>
-              <a:ln w="25400">
-                <a:solidFill>
-                  <a:schemeClr val="accent6">
-                    <a:lumMod val="75000"/>
-                  </a:schemeClr>
-                </a:solidFill>
-                <a:tailEnd type="triangle"/>
-              </a:ln>
-            </p:spPr>
-            <p:style>
-              <a:lnRef idx="1">
-                <a:schemeClr val="accent1"/>
-              </a:lnRef>
-              <a:fillRef idx="0">
-                <a:schemeClr val="accent1"/>
-              </a:fillRef>
-              <a:effectRef idx="0">
-                <a:schemeClr val="accent1"/>
-              </a:effectRef>
-              <a:fontRef idx="minor">
-                <a:schemeClr val="tx1"/>
-              </a:fontRef>
-            </p:style>
-          </p:cxnSp>
-        </p:grpSp>
-        <p:grpSp>
-          <p:nvGrpSpPr>
-            <p:cNvPr id="34" name="그룹 33"/>
-            <p:cNvGrpSpPr/>
-            <p:nvPr/>
-          </p:nvGrpSpPr>
-          <p:grpSpPr>
-            <a:xfrm>
-              <a:off x="93685" y="1412776"/>
-              <a:ext cx="2016224" cy="2592289"/>
-              <a:chOff x="93685" y="260646"/>
-              <a:chExt cx="2016224" cy="2592289"/>
-            </a:xfrm>
-          </p:grpSpPr>
-          <p:sp>
-            <p:nvSpPr>
-              <p:cNvPr id="35" name="모서리가 둥근 직사각형 34"/>
-              <p:cNvSpPr/>
-              <p:nvPr/>
-            </p:nvSpPr>
-            <p:spPr>
-              <a:xfrm>
-                <a:off x="93685" y="260646"/>
-                <a:ext cx="2016224" cy="2592289"/>
-              </a:xfrm>
-              <a:prstGeom prst="roundRect">
-                <a:avLst/>
-              </a:prstGeom>
-              <a:noFill/>
-              <a:ln>
-                <a:solidFill>
-                  <a:schemeClr val="accent6">
-                    <a:lumMod val="75000"/>
-                  </a:schemeClr>
-                </a:solidFill>
-              </a:ln>
-            </p:spPr>
-            <p:style>
-              <a:lnRef idx="2">
-                <a:schemeClr val="accent1">
-                  <a:shade val="50000"/>
-                </a:schemeClr>
-              </a:lnRef>
-              <a:fillRef idx="1">
-                <a:schemeClr val="accent1"/>
-              </a:fillRef>
-              <a:effectRef idx="0">
-                <a:schemeClr val="accent1"/>
-              </a:effectRef>
-              <a:fontRef idx="minor">
-                <a:schemeClr val="lt1"/>
-              </a:fontRef>
-            </p:style>
-            <p:txBody>
-              <a:bodyPr rtlCol="0" anchor="ctr"/>
-              <a:lstStyle/>
-              <a:p>
-                <a:pPr algn="ctr"/>
-                <a:endParaRPr lang="en-US" altLang="ko-KR" sz="1200" dirty="0" smtClean="0">
-                  <a:solidFill>
-                    <a:schemeClr val="tx1"/>
-                  </a:solidFill>
-                </a:endParaRPr>
-              </a:p>
-              <a:p>
-                <a:pPr algn="ctr"/>
-                <a:endParaRPr lang="en-US" altLang="ko-KR" sz="1200" dirty="0">
-                  <a:solidFill>
-                    <a:schemeClr val="tx1"/>
-                  </a:solidFill>
-                </a:endParaRPr>
-              </a:p>
-              <a:p>
-                <a:pPr algn="ctr"/>
-                <a:endParaRPr lang="en-US" altLang="ko-KR" sz="1200" dirty="0" smtClean="0">
-                  <a:solidFill>
-                    <a:schemeClr val="tx1"/>
-                  </a:solidFill>
-                </a:endParaRPr>
-              </a:p>
-              <a:p>
-                <a:pPr algn="ctr"/>
-                <a:endParaRPr lang="en-US" altLang="ko-KR" sz="1200" dirty="0">
-                  <a:solidFill>
-                    <a:schemeClr val="tx1"/>
-                  </a:solidFill>
-                </a:endParaRPr>
-              </a:p>
-              <a:p>
-                <a:pPr algn="ctr"/>
-                <a:endParaRPr lang="en-US" altLang="ko-KR" sz="1200" dirty="0" smtClean="0">
-                  <a:solidFill>
-                    <a:schemeClr val="tx1"/>
-                  </a:solidFill>
-                </a:endParaRPr>
-              </a:p>
-              <a:p>
-                <a:pPr algn="ctr"/>
-                <a:endParaRPr lang="en-US" altLang="ko-KR" sz="1200" dirty="0" smtClean="0">
-                  <a:solidFill>
-                    <a:schemeClr val="tx1"/>
-                  </a:solidFill>
-                </a:endParaRPr>
-              </a:p>
-              <a:p>
-                <a:pPr algn="ctr"/>
-                <a:endParaRPr lang="en-US" altLang="ko-KR" sz="1200" dirty="0">
-                  <a:solidFill>
-                    <a:schemeClr val="tx1"/>
-                  </a:solidFill>
-                </a:endParaRPr>
-              </a:p>
-              <a:p>
-                <a:pPr algn="ctr"/>
-                <a:endParaRPr lang="en-US" altLang="ko-KR" sz="1200" dirty="0">
-                  <a:solidFill>
-                    <a:schemeClr val="tx1"/>
-                  </a:solidFill>
-                </a:endParaRPr>
-              </a:p>
-              <a:p>
-                <a:pPr algn="r"/>
-                <a:r>
-                  <a:rPr lang="en-US" altLang="ko-KR" sz="1200" dirty="0" err="1" smtClean="0">
-                    <a:solidFill>
-                      <a:schemeClr val="tx1"/>
-                    </a:solidFill>
-                  </a:rPr>
-                  <a:t>datastructure</a:t>
-                </a:r>
-                <a:endParaRPr lang="en-US" altLang="ko-KR" sz="1200" dirty="0" smtClean="0">
-                  <a:solidFill>
-                    <a:schemeClr val="tx1"/>
-                  </a:solidFill>
-                </a:endParaRPr>
-              </a:p>
-            </p:txBody>
-          </p:sp>
-          <p:sp>
-            <p:nvSpPr>
-              <p:cNvPr id="36" name="모서리가 둥근 직사각형 35"/>
-              <p:cNvSpPr/>
-              <p:nvPr/>
-            </p:nvSpPr>
-            <p:spPr>
-              <a:xfrm>
-                <a:off x="395536" y="425204"/>
-                <a:ext cx="1440160" cy="360040"/>
-              </a:xfrm>
-              <a:prstGeom prst="roundRect">
-                <a:avLst/>
-              </a:prstGeom>
-              <a:solidFill>
-                <a:schemeClr val="accent6">
-                  <a:lumMod val="75000"/>
-                </a:schemeClr>
-              </a:solidFill>
-              <a:ln>
-                <a:noFill/>
-              </a:ln>
-            </p:spPr>
-            <p:style>
-              <a:lnRef idx="2">
-                <a:schemeClr val="accent1">
-                  <a:shade val="50000"/>
-                </a:schemeClr>
-              </a:lnRef>
-              <a:fillRef idx="1">
-                <a:schemeClr val="accent1"/>
-              </a:fillRef>
-              <a:effectRef idx="0">
-                <a:schemeClr val="accent1"/>
-              </a:effectRef>
-              <a:fontRef idx="minor">
-                <a:schemeClr val="lt1"/>
-              </a:fontRef>
-            </p:style>
-            <p:txBody>
-              <a:bodyPr rtlCol="0" anchor="ctr"/>
-              <a:lstStyle/>
-              <a:p>
-                <a:pPr algn="ctr"/>
-                <a:r>
-                  <a:rPr lang="en-US" altLang="ko-KR" sz="1200" dirty="0" smtClean="0"/>
-                  <a:t>Linked list</a:t>
-                </a:r>
-                <a:endParaRPr lang="ko-KR" altLang="en-US" sz="1200" dirty="0"/>
-              </a:p>
-            </p:txBody>
-          </p:sp>
-          <p:sp>
-            <p:nvSpPr>
-              <p:cNvPr id="37" name="모서리가 둥근 직사각형 36"/>
-              <p:cNvSpPr/>
-              <p:nvPr/>
-            </p:nvSpPr>
-            <p:spPr>
-              <a:xfrm>
-                <a:off x="395536" y="925856"/>
-                <a:ext cx="1440160" cy="360040"/>
-              </a:xfrm>
-              <a:prstGeom prst="roundRect">
-                <a:avLst/>
-              </a:prstGeom>
-              <a:solidFill>
-                <a:schemeClr val="bg1">
-                  <a:lumMod val="65000"/>
-                </a:schemeClr>
-              </a:solidFill>
-              <a:ln>
-                <a:noFill/>
-              </a:ln>
-            </p:spPr>
-            <p:style>
-              <a:lnRef idx="2">
-                <a:schemeClr val="accent1">
-                  <a:shade val="50000"/>
-                </a:schemeClr>
-              </a:lnRef>
-              <a:fillRef idx="1">
-                <a:schemeClr val="accent1"/>
-              </a:fillRef>
-              <a:effectRef idx="0">
-                <a:schemeClr val="accent1"/>
-              </a:effectRef>
-              <a:fontRef idx="minor">
-                <a:schemeClr val="lt1"/>
-              </a:fontRef>
-            </p:style>
-            <p:txBody>
-              <a:bodyPr rtlCol="0" anchor="ctr"/>
-              <a:lstStyle/>
-              <a:p>
-                <a:pPr algn="ctr"/>
-                <a:r>
-                  <a:rPr lang="en-US" altLang="ko-KR" sz="1200" dirty="0" smtClean="0"/>
-                  <a:t>stack</a:t>
-                </a:r>
-                <a:endParaRPr lang="ko-KR" altLang="en-US" sz="1200" dirty="0"/>
-              </a:p>
-            </p:txBody>
-          </p:sp>
-          <p:sp>
-            <p:nvSpPr>
-              <p:cNvPr id="38" name="모서리가 둥근 직사각형 37"/>
-              <p:cNvSpPr/>
-              <p:nvPr/>
-            </p:nvSpPr>
-            <p:spPr>
-              <a:xfrm>
-                <a:off x="395536" y="1488974"/>
-                <a:ext cx="1440160" cy="360040"/>
-              </a:xfrm>
-              <a:prstGeom prst="roundRect">
-                <a:avLst/>
-              </a:prstGeom>
-              <a:solidFill>
-                <a:schemeClr val="accent6">
-                  <a:lumMod val="75000"/>
-                </a:schemeClr>
-              </a:solidFill>
-              <a:ln>
-                <a:noFill/>
-              </a:ln>
-            </p:spPr>
-            <p:style>
-              <a:lnRef idx="2">
-                <a:schemeClr val="accent1">
-                  <a:shade val="50000"/>
-                </a:schemeClr>
-              </a:lnRef>
-              <a:fillRef idx="1">
-                <a:schemeClr val="accent1"/>
-              </a:fillRef>
-              <a:effectRef idx="0">
-                <a:schemeClr val="accent1"/>
-              </a:effectRef>
-              <a:fontRef idx="minor">
-                <a:schemeClr val="lt1"/>
-              </a:fontRef>
-            </p:style>
-            <p:txBody>
-              <a:bodyPr rtlCol="0" anchor="ctr"/>
-              <a:lstStyle/>
-              <a:p>
-                <a:pPr algn="ctr"/>
-                <a:r>
-                  <a:rPr lang="en-US" altLang="ko-KR" sz="1200" dirty="0" smtClean="0"/>
-                  <a:t>queue</a:t>
-                </a:r>
-                <a:endParaRPr lang="ko-KR" altLang="en-US" sz="1200" dirty="0"/>
-              </a:p>
-            </p:txBody>
-          </p:sp>
-          <p:sp>
-            <p:nvSpPr>
-              <p:cNvPr id="39" name="모서리가 둥근 직사각형 38"/>
-              <p:cNvSpPr/>
-              <p:nvPr/>
-            </p:nvSpPr>
-            <p:spPr>
-              <a:xfrm>
-                <a:off x="395536" y="1964911"/>
-                <a:ext cx="1440160" cy="360040"/>
-              </a:xfrm>
-              <a:prstGeom prst="roundRect">
-                <a:avLst/>
-              </a:prstGeom>
-              <a:solidFill>
-                <a:schemeClr val="accent6">
-                  <a:lumMod val="75000"/>
-                </a:schemeClr>
-              </a:solidFill>
-              <a:ln>
-                <a:noFill/>
-              </a:ln>
-            </p:spPr>
-            <p:style>
-              <a:lnRef idx="2">
-                <a:schemeClr val="accent1">
-                  <a:shade val="50000"/>
-                </a:schemeClr>
-              </a:lnRef>
-              <a:fillRef idx="1">
-                <a:schemeClr val="accent1"/>
-              </a:fillRef>
-              <a:effectRef idx="0">
-                <a:schemeClr val="accent1"/>
-              </a:effectRef>
-              <a:fontRef idx="minor">
-                <a:schemeClr val="lt1"/>
-              </a:fontRef>
-            </p:style>
-            <p:txBody>
-              <a:bodyPr rtlCol="0" anchor="ctr"/>
-              <a:lstStyle/>
-              <a:p>
-                <a:pPr algn="ctr"/>
-                <a:r>
-                  <a:rPr lang="en-US" altLang="ko-KR" sz="1200" dirty="0" err="1" smtClean="0"/>
-                  <a:t>ds_sort</a:t>
-                </a:r>
-                <a:endParaRPr lang="ko-KR" altLang="en-US" sz="1200" dirty="0"/>
-              </a:p>
-            </p:txBody>
-          </p:sp>
-        </p:grpSp>
-        <p:grpSp>
-          <p:nvGrpSpPr>
-            <p:cNvPr id="40" name="그룹 39"/>
-            <p:cNvGrpSpPr/>
-            <p:nvPr/>
-          </p:nvGrpSpPr>
-          <p:grpSpPr>
-            <a:xfrm>
-              <a:off x="93685" y="4235696"/>
-              <a:ext cx="2016224" cy="2592289"/>
-              <a:chOff x="93685" y="3191766"/>
-              <a:chExt cx="2016224" cy="2592289"/>
-            </a:xfrm>
-          </p:grpSpPr>
-          <p:sp>
-            <p:nvSpPr>
-              <p:cNvPr id="41" name="모서리가 둥근 직사각형 40"/>
-              <p:cNvSpPr/>
-              <p:nvPr/>
-            </p:nvSpPr>
-            <p:spPr>
-              <a:xfrm>
-                <a:off x="93685" y="3191766"/>
-                <a:ext cx="2016224" cy="2592289"/>
-              </a:xfrm>
-              <a:prstGeom prst="roundRect">
-                <a:avLst/>
-              </a:prstGeom>
-              <a:noFill/>
-              <a:ln>
-                <a:solidFill>
-                  <a:schemeClr val="accent6">
-                    <a:lumMod val="75000"/>
-                  </a:schemeClr>
-                </a:solidFill>
-              </a:ln>
-            </p:spPr>
-            <p:style>
-              <a:lnRef idx="2">
-                <a:schemeClr val="accent1">
-                  <a:shade val="50000"/>
-                </a:schemeClr>
-              </a:lnRef>
-              <a:fillRef idx="1">
-                <a:schemeClr val="accent1"/>
-              </a:fillRef>
-              <a:effectRef idx="0">
-                <a:schemeClr val="accent1"/>
-              </a:effectRef>
-              <a:fontRef idx="minor">
-                <a:schemeClr val="lt1"/>
-              </a:fontRef>
-            </p:style>
-            <p:txBody>
-              <a:bodyPr rtlCol="0" anchor="ctr"/>
-              <a:lstStyle/>
-              <a:p>
-                <a:pPr algn="ctr"/>
-                <a:endParaRPr lang="en-US" altLang="ko-KR" sz="1200" dirty="0" smtClean="0">
-                  <a:solidFill>
-                    <a:schemeClr val="tx1"/>
-                  </a:solidFill>
-                </a:endParaRPr>
-              </a:p>
-              <a:p>
-                <a:pPr algn="ctr"/>
-                <a:endParaRPr lang="en-US" altLang="ko-KR" sz="1200" dirty="0">
-                  <a:solidFill>
-                    <a:schemeClr val="tx1"/>
-                  </a:solidFill>
-                </a:endParaRPr>
-              </a:p>
-              <a:p>
-                <a:pPr algn="ctr"/>
-                <a:endParaRPr lang="en-US" altLang="ko-KR" sz="1200" dirty="0" smtClean="0">
-                  <a:solidFill>
-                    <a:schemeClr val="tx1"/>
-                  </a:solidFill>
-                </a:endParaRPr>
-              </a:p>
-              <a:p>
-                <a:pPr algn="ctr"/>
-                <a:endParaRPr lang="en-US" altLang="ko-KR" sz="1200" dirty="0">
-                  <a:solidFill>
-                    <a:schemeClr val="tx1"/>
-                  </a:solidFill>
-                </a:endParaRPr>
-              </a:p>
-              <a:p>
-                <a:pPr algn="ctr"/>
-                <a:endParaRPr lang="en-US" altLang="ko-KR" sz="1200" dirty="0" smtClean="0">
-                  <a:solidFill>
-                    <a:schemeClr val="tx1"/>
-                  </a:solidFill>
-                </a:endParaRPr>
-              </a:p>
-              <a:p>
-                <a:pPr algn="ctr"/>
-                <a:endParaRPr lang="en-US" altLang="ko-KR" sz="1200" dirty="0" smtClean="0">
-                  <a:solidFill>
-                    <a:schemeClr val="tx1"/>
-                  </a:solidFill>
-                </a:endParaRPr>
-              </a:p>
-              <a:p>
-                <a:pPr algn="ctr"/>
-                <a:endParaRPr lang="en-US" altLang="ko-KR" sz="1200" dirty="0">
-                  <a:solidFill>
-                    <a:schemeClr val="tx1"/>
-                  </a:solidFill>
-                </a:endParaRPr>
-              </a:p>
-              <a:p>
-                <a:pPr algn="ctr"/>
-                <a:endParaRPr lang="en-US" altLang="ko-KR" sz="1200" dirty="0">
-                  <a:solidFill>
-                    <a:schemeClr val="tx1"/>
-                  </a:solidFill>
-                </a:endParaRPr>
-              </a:p>
-              <a:p>
-                <a:pPr algn="r"/>
-                <a:r>
-                  <a:rPr lang="en-US" altLang="ko-KR" sz="1200" dirty="0" err="1" smtClean="0">
-                    <a:solidFill>
-                      <a:schemeClr val="tx1"/>
-                    </a:solidFill>
-                  </a:rPr>
-                  <a:t>memmgr</a:t>
-                </a:r>
-                <a:endParaRPr lang="en-US" altLang="ko-KR" sz="1200" dirty="0" smtClean="0">
-                  <a:solidFill>
-                    <a:schemeClr val="tx1"/>
-                  </a:solidFill>
-                </a:endParaRPr>
-              </a:p>
-            </p:txBody>
-          </p:sp>
-          <p:sp>
-            <p:nvSpPr>
-              <p:cNvPr id="42" name="모서리가 둥근 직사각형 41"/>
-              <p:cNvSpPr/>
-              <p:nvPr/>
-            </p:nvSpPr>
-            <p:spPr>
-              <a:xfrm>
-                <a:off x="395536" y="3601369"/>
-                <a:ext cx="1440160" cy="360040"/>
-              </a:xfrm>
-              <a:prstGeom prst="roundRect">
-                <a:avLst/>
-              </a:prstGeom>
-              <a:solidFill>
-                <a:schemeClr val="accent6">
-                  <a:lumMod val="75000"/>
-                </a:schemeClr>
-              </a:solidFill>
-              <a:ln>
-                <a:noFill/>
-              </a:ln>
-            </p:spPr>
-            <p:style>
-              <a:lnRef idx="2">
-                <a:schemeClr val="accent1">
-                  <a:shade val="50000"/>
-                </a:schemeClr>
-              </a:lnRef>
-              <a:fillRef idx="1">
-                <a:schemeClr val="accent1"/>
-              </a:fillRef>
-              <a:effectRef idx="0">
-                <a:schemeClr val="accent1"/>
-              </a:effectRef>
-              <a:fontRef idx="minor">
-                <a:schemeClr val="lt1"/>
-              </a:fontRef>
-            </p:style>
-            <p:txBody>
-              <a:bodyPr rtlCol="0" anchor="ctr"/>
-              <a:lstStyle/>
-              <a:p>
-                <a:pPr algn="ctr"/>
-                <a:r>
-                  <a:rPr lang="en-US" altLang="ko-KR" sz="1100" dirty="0" err="1" smtClean="0"/>
-                  <a:t>memmgr</a:t>
-                </a:r>
-                <a:endParaRPr lang="ko-KR" altLang="en-US" sz="1100" dirty="0"/>
-              </a:p>
-            </p:txBody>
-          </p:sp>
-        </p:grpSp>
-      </p:grpSp>
+            </a:endParaRPr>
+          </a:p>
+        </p:txBody>
+      </p:sp>
+      <p:sp>
+        <p:nvSpPr>
+          <p:cNvPr id="20" name="모서리가 둥근 직사각형 19"/>
+          <p:cNvSpPr/>
+          <p:nvPr/>
+        </p:nvSpPr>
+        <p:spPr>
+          <a:xfrm>
+            <a:off x="1713127" y="3859256"/>
+            <a:ext cx="1133967" cy="257720"/>
+          </a:xfrm>
+          <a:prstGeom prst="roundRect">
+            <a:avLst/>
+          </a:prstGeom>
+          <a:solidFill>
+            <a:schemeClr val="accent5"/>
+          </a:solidFill>
+          <a:ln>
+            <a:noFill/>
+          </a:ln>
+        </p:spPr>
+        <p:style>
+          <a:lnRef idx="2">
+            <a:schemeClr val="accent1">
+              <a:shade val="50000"/>
+            </a:schemeClr>
+          </a:lnRef>
+          <a:fillRef idx="1">
+            <a:schemeClr val="accent1"/>
+          </a:fillRef>
+          <a:effectRef idx="0">
+            <a:schemeClr val="accent1"/>
+          </a:effectRef>
+          <a:fontRef idx="minor">
+            <a:schemeClr val="lt1"/>
+          </a:fontRef>
+        </p:style>
+        <p:txBody>
+          <a:bodyPr rtlCol="0" anchor="ctr"/>
+          <a:lstStyle/>
+          <a:p>
+            <a:pPr algn="ctr"/>
+            <a:r>
+              <a:rPr lang="en-US" altLang="ko-KR" sz="1100" dirty="0" err="1" smtClean="0"/>
+              <a:t>binarization</a:t>
+            </a:r>
+            <a:endParaRPr lang="ko-KR" altLang="en-US" sz="1100" dirty="0"/>
+          </a:p>
+        </p:txBody>
+      </p:sp>
+      <p:sp>
+        <p:nvSpPr>
+          <p:cNvPr id="21" name="모서리가 둥근 직사각형 20"/>
+          <p:cNvSpPr/>
+          <p:nvPr/>
+        </p:nvSpPr>
+        <p:spPr>
+          <a:xfrm>
+            <a:off x="1713127" y="4259114"/>
+            <a:ext cx="1133967" cy="257720"/>
+          </a:xfrm>
+          <a:prstGeom prst="roundRect">
+            <a:avLst/>
+          </a:prstGeom>
+          <a:solidFill>
+            <a:schemeClr val="accent5"/>
+          </a:solidFill>
+          <a:ln>
+            <a:noFill/>
+          </a:ln>
+        </p:spPr>
+        <p:style>
+          <a:lnRef idx="2">
+            <a:schemeClr val="accent1">
+              <a:shade val="50000"/>
+            </a:schemeClr>
+          </a:lnRef>
+          <a:fillRef idx="1">
+            <a:schemeClr val="accent1"/>
+          </a:fillRef>
+          <a:effectRef idx="0">
+            <a:schemeClr val="accent1"/>
+          </a:effectRef>
+          <a:fontRef idx="minor">
+            <a:schemeClr val="lt1"/>
+          </a:fontRef>
+        </p:style>
+        <p:txBody>
+          <a:bodyPr rtlCol="0" anchor="ctr"/>
+          <a:lstStyle/>
+          <a:p>
+            <a:pPr algn="ctr"/>
+            <a:r>
+              <a:rPr lang="en-US" altLang="ko-KR" sz="1100" dirty="0" err="1" smtClean="0"/>
+              <a:t>cannyedge</a:t>
+            </a:r>
+            <a:endParaRPr lang="ko-KR" altLang="en-US" sz="1100" dirty="0"/>
+          </a:p>
+        </p:txBody>
+      </p:sp>
+      <p:sp>
+        <p:nvSpPr>
+          <p:cNvPr id="22" name="모서리가 둥근 직사각형 21"/>
+          <p:cNvSpPr/>
+          <p:nvPr/>
+        </p:nvSpPr>
+        <p:spPr>
+          <a:xfrm>
+            <a:off x="1704193" y="4662180"/>
+            <a:ext cx="1133967" cy="257720"/>
+          </a:xfrm>
+          <a:prstGeom prst="roundRect">
+            <a:avLst/>
+          </a:prstGeom>
+          <a:solidFill>
+            <a:schemeClr val="accent5"/>
+          </a:solidFill>
+          <a:ln>
+            <a:noFill/>
+          </a:ln>
+        </p:spPr>
+        <p:style>
+          <a:lnRef idx="2">
+            <a:schemeClr val="accent1">
+              <a:shade val="50000"/>
+            </a:schemeClr>
+          </a:lnRef>
+          <a:fillRef idx="1">
+            <a:schemeClr val="accent1"/>
+          </a:fillRef>
+          <a:effectRef idx="0">
+            <a:schemeClr val="accent1"/>
+          </a:effectRef>
+          <a:fontRef idx="minor">
+            <a:schemeClr val="lt1"/>
+          </a:fontRef>
+        </p:style>
+        <p:txBody>
+          <a:bodyPr rtlCol="0" anchor="ctr"/>
+          <a:lstStyle/>
+          <a:p>
+            <a:pPr algn="ctr"/>
+            <a:r>
+              <a:rPr lang="en-US" altLang="ko-KR" sz="1100" dirty="0" err="1" smtClean="0"/>
+              <a:t>chaincode</a:t>
+            </a:r>
+            <a:endParaRPr lang="ko-KR" altLang="en-US" sz="1100" dirty="0"/>
+          </a:p>
+        </p:txBody>
+      </p:sp>
+      <p:sp>
+        <p:nvSpPr>
+          <p:cNvPr id="24" name="모서리가 둥근 직사각형 23"/>
+          <p:cNvSpPr/>
+          <p:nvPr/>
+        </p:nvSpPr>
+        <p:spPr>
+          <a:xfrm>
+            <a:off x="4502619" y="3859256"/>
+            <a:ext cx="1133967" cy="257720"/>
+          </a:xfrm>
+          <a:prstGeom prst="roundRect">
+            <a:avLst/>
+          </a:prstGeom>
+          <a:solidFill>
+            <a:schemeClr val="accent5"/>
+          </a:solidFill>
+          <a:ln>
+            <a:noFill/>
+          </a:ln>
+        </p:spPr>
+        <p:style>
+          <a:lnRef idx="2">
+            <a:schemeClr val="accent1">
+              <a:shade val="50000"/>
+            </a:schemeClr>
+          </a:lnRef>
+          <a:fillRef idx="1">
+            <a:schemeClr val="accent1"/>
+          </a:fillRef>
+          <a:effectRef idx="0">
+            <a:schemeClr val="accent1"/>
+          </a:effectRef>
+          <a:fontRef idx="minor">
+            <a:schemeClr val="lt1"/>
+          </a:fontRef>
+        </p:style>
+        <p:txBody>
+          <a:bodyPr rtlCol="0" anchor="ctr"/>
+          <a:lstStyle/>
+          <a:p>
+            <a:pPr algn="ctr"/>
+            <a:r>
+              <a:rPr lang="en-US" altLang="ko-KR" sz="1100" dirty="0" err="1" smtClean="0"/>
+              <a:t>convexhull</a:t>
+            </a:r>
+            <a:endParaRPr lang="ko-KR" altLang="en-US" sz="1100" dirty="0"/>
+          </a:p>
+        </p:txBody>
+      </p:sp>
+      <p:sp>
+        <p:nvSpPr>
+          <p:cNvPr id="25" name="모서리가 둥근 직사각형 24"/>
+          <p:cNvSpPr/>
+          <p:nvPr/>
+        </p:nvSpPr>
+        <p:spPr>
+          <a:xfrm>
+            <a:off x="3107873" y="3851046"/>
+            <a:ext cx="1133967" cy="257720"/>
+          </a:xfrm>
+          <a:prstGeom prst="roundRect">
+            <a:avLst/>
+          </a:prstGeom>
+          <a:solidFill>
+            <a:schemeClr val="accent5"/>
+          </a:solidFill>
+          <a:ln>
+            <a:noFill/>
+          </a:ln>
+        </p:spPr>
+        <p:style>
+          <a:lnRef idx="2">
+            <a:schemeClr val="accent1">
+              <a:shade val="50000"/>
+            </a:schemeClr>
+          </a:lnRef>
+          <a:fillRef idx="1">
+            <a:schemeClr val="accent1"/>
+          </a:fillRef>
+          <a:effectRef idx="0">
+            <a:schemeClr val="accent1"/>
+          </a:effectRef>
+          <a:fontRef idx="minor">
+            <a:schemeClr val="lt1"/>
+          </a:fontRef>
+        </p:style>
+        <p:txBody>
+          <a:bodyPr rtlCol="0" anchor="ctr"/>
+          <a:lstStyle/>
+          <a:p>
+            <a:pPr algn="ctr"/>
+            <a:r>
+              <a:rPr lang="en-US" altLang="ko-KR" sz="1100" dirty="0" err="1" smtClean="0"/>
+              <a:t>dp</a:t>
+            </a:r>
+            <a:endParaRPr lang="ko-KR" altLang="en-US" sz="1100" dirty="0"/>
+          </a:p>
+        </p:txBody>
+      </p:sp>
+      <p:sp>
+        <p:nvSpPr>
+          <p:cNvPr id="26" name="모서리가 둥근 직사각형 25"/>
+          <p:cNvSpPr/>
+          <p:nvPr/>
+        </p:nvSpPr>
+        <p:spPr>
+          <a:xfrm>
+            <a:off x="3107873" y="4259114"/>
+            <a:ext cx="1133967" cy="257720"/>
+          </a:xfrm>
+          <a:prstGeom prst="roundRect">
+            <a:avLst/>
+          </a:prstGeom>
+          <a:solidFill>
+            <a:schemeClr val="accent5"/>
+          </a:solidFill>
+          <a:ln>
+            <a:noFill/>
+          </a:ln>
+        </p:spPr>
+        <p:style>
+          <a:lnRef idx="2">
+            <a:schemeClr val="accent1">
+              <a:shade val="50000"/>
+            </a:schemeClr>
+          </a:lnRef>
+          <a:fillRef idx="1">
+            <a:schemeClr val="accent1"/>
+          </a:fillRef>
+          <a:effectRef idx="0">
+            <a:schemeClr val="accent1"/>
+          </a:effectRef>
+          <a:fontRef idx="minor">
+            <a:schemeClr val="lt1"/>
+          </a:fontRef>
+        </p:style>
+        <p:txBody>
+          <a:bodyPr rtlCol="0" anchor="ctr"/>
+          <a:lstStyle/>
+          <a:p>
+            <a:pPr algn="ctr"/>
+            <a:r>
+              <a:rPr lang="en-US" altLang="ko-KR" sz="1100" dirty="0" smtClean="0"/>
+              <a:t>feature</a:t>
+            </a:r>
+            <a:endParaRPr lang="ko-KR" altLang="en-US" sz="1100" dirty="0"/>
+          </a:p>
+        </p:txBody>
+      </p:sp>
+      <p:sp>
+        <p:nvSpPr>
+          <p:cNvPr id="27" name="모서리가 둥근 직사각형 26"/>
+          <p:cNvSpPr/>
+          <p:nvPr/>
+        </p:nvSpPr>
+        <p:spPr>
+          <a:xfrm>
+            <a:off x="4502619" y="4271430"/>
+            <a:ext cx="1133967" cy="257720"/>
+          </a:xfrm>
+          <a:prstGeom prst="roundRect">
+            <a:avLst/>
+          </a:prstGeom>
+          <a:solidFill>
+            <a:schemeClr val="accent5"/>
+          </a:solidFill>
+          <a:ln>
+            <a:noFill/>
+          </a:ln>
+        </p:spPr>
+        <p:style>
+          <a:lnRef idx="2">
+            <a:schemeClr val="accent1">
+              <a:shade val="50000"/>
+            </a:schemeClr>
+          </a:lnRef>
+          <a:fillRef idx="1">
+            <a:schemeClr val="accent1"/>
+          </a:fillRef>
+          <a:effectRef idx="0">
+            <a:schemeClr val="accent1"/>
+          </a:effectRef>
+          <a:fontRef idx="minor">
+            <a:schemeClr val="lt1"/>
+          </a:fontRef>
+        </p:style>
+        <p:txBody>
+          <a:bodyPr rtlCol="0" anchor="ctr"/>
+          <a:lstStyle/>
+          <a:p>
+            <a:pPr algn="ctr"/>
+            <a:r>
+              <a:rPr lang="en-US" altLang="ko-KR" sz="1100" dirty="0" smtClean="0"/>
+              <a:t>filter</a:t>
+            </a:r>
+            <a:endParaRPr lang="ko-KR" altLang="en-US" sz="1100" dirty="0"/>
+          </a:p>
+        </p:txBody>
+      </p:sp>
+      <p:sp>
+        <p:nvSpPr>
+          <p:cNvPr id="28" name="모서리가 둥근 직사각형 27"/>
+          <p:cNvSpPr/>
+          <p:nvPr/>
+        </p:nvSpPr>
+        <p:spPr>
+          <a:xfrm>
+            <a:off x="4499640" y="4641119"/>
+            <a:ext cx="1133967" cy="257720"/>
+          </a:xfrm>
+          <a:prstGeom prst="roundRect">
+            <a:avLst/>
+          </a:prstGeom>
+          <a:solidFill>
+            <a:schemeClr val="accent5"/>
+          </a:solidFill>
+          <a:ln>
+            <a:noFill/>
+          </a:ln>
+        </p:spPr>
+        <p:style>
+          <a:lnRef idx="2">
+            <a:schemeClr val="accent1">
+              <a:shade val="50000"/>
+            </a:schemeClr>
+          </a:lnRef>
+          <a:fillRef idx="1">
+            <a:schemeClr val="accent1"/>
+          </a:fillRef>
+          <a:effectRef idx="0">
+            <a:schemeClr val="accent1"/>
+          </a:effectRef>
+          <a:fontRef idx="minor">
+            <a:schemeClr val="lt1"/>
+          </a:fontRef>
+        </p:style>
+        <p:txBody>
+          <a:bodyPr rtlCol="0" anchor="ctr"/>
+          <a:lstStyle/>
+          <a:p>
+            <a:pPr algn="ctr"/>
+            <a:r>
+              <a:rPr lang="en-US" altLang="ko-KR" sz="1100" dirty="0" smtClean="0"/>
+              <a:t>histogram</a:t>
+            </a:r>
+            <a:endParaRPr lang="ko-KR" altLang="en-US" sz="1100" dirty="0"/>
+          </a:p>
+        </p:txBody>
+      </p:sp>
+      <p:sp>
+        <p:nvSpPr>
+          <p:cNvPr id="29" name="모서리가 둥근 직사각형 28"/>
+          <p:cNvSpPr/>
+          <p:nvPr/>
+        </p:nvSpPr>
+        <p:spPr>
+          <a:xfrm>
+            <a:off x="5897364" y="3851046"/>
+            <a:ext cx="1133967" cy="257720"/>
+          </a:xfrm>
+          <a:prstGeom prst="roundRect">
+            <a:avLst/>
+          </a:prstGeom>
+          <a:solidFill>
+            <a:schemeClr val="accent5"/>
+          </a:solidFill>
+          <a:ln>
+            <a:noFill/>
+          </a:ln>
+        </p:spPr>
+        <p:style>
+          <a:lnRef idx="2">
+            <a:schemeClr val="accent1">
+              <a:shade val="50000"/>
+            </a:schemeClr>
+          </a:lnRef>
+          <a:fillRef idx="1">
+            <a:schemeClr val="accent1"/>
+          </a:fillRef>
+          <a:effectRef idx="0">
+            <a:schemeClr val="accent1"/>
+          </a:effectRef>
+          <a:fontRef idx="minor">
+            <a:schemeClr val="lt1"/>
+          </a:fontRef>
+        </p:style>
+        <p:txBody>
+          <a:bodyPr rtlCol="0" anchor="ctr"/>
+          <a:lstStyle/>
+          <a:p>
+            <a:pPr algn="ctr"/>
+            <a:r>
+              <a:rPr lang="en-US" altLang="ko-KR" sz="1100" dirty="0" smtClean="0"/>
+              <a:t>labeling</a:t>
+            </a:r>
+            <a:endParaRPr lang="ko-KR" altLang="en-US" sz="1100" dirty="0"/>
+          </a:p>
+        </p:txBody>
+      </p:sp>
+      <p:sp>
+        <p:nvSpPr>
+          <p:cNvPr id="30" name="모서리가 둥근 직사각형 29"/>
+          <p:cNvSpPr/>
+          <p:nvPr/>
+        </p:nvSpPr>
+        <p:spPr>
+          <a:xfrm>
+            <a:off x="3101917" y="4667182"/>
+            <a:ext cx="1133967" cy="257720"/>
+          </a:xfrm>
+          <a:prstGeom prst="roundRect">
+            <a:avLst/>
+          </a:prstGeom>
+          <a:solidFill>
+            <a:schemeClr val="accent5"/>
+          </a:solidFill>
+          <a:ln>
+            <a:noFill/>
+          </a:ln>
+        </p:spPr>
+        <p:style>
+          <a:lnRef idx="2">
+            <a:schemeClr val="accent1">
+              <a:shade val="50000"/>
+            </a:schemeClr>
+          </a:lnRef>
+          <a:fillRef idx="1">
+            <a:schemeClr val="accent1"/>
+          </a:fillRef>
+          <a:effectRef idx="0">
+            <a:schemeClr val="accent1"/>
+          </a:effectRef>
+          <a:fontRef idx="minor">
+            <a:schemeClr val="lt1"/>
+          </a:fontRef>
+        </p:style>
+        <p:txBody>
+          <a:bodyPr rtlCol="0" anchor="ctr"/>
+          <a:lstStyle/>
+          <a:p>
+            <a:pPr algn="ctr"/>
+            <a:r>
+              <a:rPr lang="en-US" altLang="ko-KR" sz="1100" dirty="0" smtClean="0"/>
+              <a:t>morphology</a:t>
+            </a:r>
+            <a:endParaRPr lang="ko-KR" altLang="en-US" sz="1100" dirty="0"/>
+          </a:p>
+        </p:txBody>
+      </p:sp>
+      <p:sp>
+        <p:nvSpPr>
+          <p:cNvPr id="31" name="모서리가 둥근 직사각형 30"/>
+          <p:cNvSpPr/>
+          <p:nvPr/>
+        </p:nvSpPr>
+        <p:spPr>
+          <a:xfrm>
+            <a:off x="5238233" y="2455764"/>
+            <a:ext cx="1133967" cy="257720"/>
+          </a:xfrm>
+          <a:prstGeom prst="roundRect">
+            <a:avLst/>
+          </a:prstGeom>
+          <a:solidFill>
+            <a:schemeClr val="accent5"/>
+          </a:solidFill>
+          <a:ln>
+            <a:noFill/>
+          </a:ln>
+        </p:spPr>
+        <p:style>
+          <a:lnRef idx="2">
+            <a:schemeClr val="accent1">
+              <a:shade val="50000"/>
+            </a:schemeClr>
+          </a:lnRef>
+          <a:fillRef idx="1">
+            <a:schemeClr val="accent1"/>
+          </a:fillRef>
+          <a:effectRef idx="0">
+            <a:schemeClr val="accent1"/>
+          </a:effectRef>
+          <a:fontRef idx="minor">
+            <a:schemeClr val="lt1"/>
+          </a:fontRef>
+        </p:style>
+        <p:txBody>
+          <a:bodyPr rtlCol="0" anchor="ctr"/>
+          <a:lstStyle/>
+          <a:p>
+            <a:pPr algn="ctr"/>
+            <a:r>
+              <a:rPr lang="en-US" altLang="ko-KR" sz="1100" dirty="0" err="1" smtClean="0"/>
+              <a:t>imgresize</a:t>
+            </a:r>
+            <a:endParaRPr lang="ko-KR" altLang="en-US" sz="1100" dirty="0"/>
+          </a:p>
+        </p:txBody>
+      </p:sp>
+      <p:sp>
+        <p:nvSpPr>
+          <p:cNvPr id="32" name="모서리가 둥근 직사각형 31"/>
+          <p:cNvSpPr/>
+          <p:nvPr/>
+        </p:nvSpPr>
+        <p:spPr>
+          <a:xfrm>
+            <a:off x="5897364" y="4259114"/>
+            <a:ext cx="1133967" cy="257720"/>
+          </a:xfrm>
+          <a:prstGeom prst="roundRect">
+            <a:avLst/>
+          </a:prstGeom>
+          <a:solidFill>
+            <a:schemeClr val="accent5"/>
+          </a:solidFill>
+          <a:ln>
+            <a:noFill/>
+          </a:ln>
+        </p:spPr>
+        <p:style>
+          <a:lnRef idx="2">
+            <a:schemeClr val="accent1">
+              <a:shade val="50000"/>
+            </a:schemeClr>
+          </a:lnRef>
+          <a:fillRef idx="1">
+            <a:schemeClr val="accent1"/>
+          </a:fillRef>
+          <a:effectRef idx="0">
+            <a:schemeClr val="accent1"/>
+          </a:effectRef>
+          <a:fontRef idx="minor">
+            <a:schemeClr val="lt1"/>
+          </a:fontRef>
+        </p:style>
+        <p:txBody>
+          <a:bodyPr rtlCol="0" anchor="ctr"/>
+          <a:lstStyle/>
+          <a:p>
+            <a:pPr algn="ctr"/>
+            <a:r>
+              <a:rPr lang="en-US" altLang="ko-KR" sz="1100" dirty="0" smtClean="0"/>
+              <a:t>thinning</a:t>
+            </a:r>
+            <a:endParaRPr lang="ko-KR" altLang="en-US" sz="1100" dirty="0"/>
+          </a:p>
+        </p:txBody>
+      </p:sp>
+      <p:cxnSp>
+        <p:nvCxnSpPr>
+          <p:cNvPr id="33" name="직선 연결선 32"/>
+          <p:cNvCxnSpPr>
+            <a:stCxn id="17" idx="2"/>
+            <a:endCxn id="19" idx="0"/>
+          </p:cNvCxnSpPr>
+          <p:nvPr/>
+        </p:nvCxnSpPr>
+        <p:spPr>
+          <a:xfrm flipH="1">
+            <a:off x="4319562" y="3442439"/>
+            <a:ext cx="410" cy="256480"/>
+          </a:xfrm>
+          <a:prstGeom prst="line">
+            <a:avLst/>
+          </a:prstGeom>
+          <a:ln w="25400">
+            <a:solidFill>
+              <a:schemeClr val="accent6">
+                <a:lumMod val="75000"/>
+              </a:schemeClr>
+            </a:solidFill>
+            <a:tailEnd type="triangle"/>
+          </a:ln>
+        </p:spPr>
+        <p:style>
+          <a:lnRef idx="1">
+            <a:schemeClr val="accent1"/>
+          </a:lnRef>
+          <a:fillRef idx="0">
+            <a:schemeClr val="accent1"/>
+          </a:fillRef>
+          <a:effectRef idx="0">
+            <a:schemeClr val="accent1"/>
+          </a:effectRef>
+          <a:fontRef idx="minor">
+            <a:schemeClr val="tx1"/>
+          </a:fontRef>
+        </p:style>
+      </p:cxnSp>
+      <p:sp>
+        <p:nvSpPr>
+          <p:cNvPr id="42" name="모서리가 둥근 직사각형 41"/>
+          <p:cNvSpPr/>
+          <p:nvPr/>
+        </p:nvSpPr>
+        <p:spPr>
+          <a:xfrm>
+            <a:off x="2903793" y="1591174"/>
+            <a:ext cx="1133966" cy="257720"/>
+          </a:xfrm>
+          <a:prstGeom prst="roundRect">
+            <a:avLst/>
+          </a:prstGeom>
+          <a:solidFill>
+            <a:schemeClr val="accent6">
+              <a:lumMod val="75000"/>
+            </a:schemeClr>
+          </a:solidFill>
+          <a:ln>
+            <a:noFill/>
+          </a:ln>
+        </p:spPr>
+        <p:style>
+          <a:lnRef idx="2">
+            <a:schemeClr val="accent1">
+              <a:shade val="50000"/>
+            </a:schemeClr>
+          </a:lnRef>
+          <a:fillRef idx="1">
+            <a:schemeClr val="accent1"/>
+          </a:fillRef>
+          <a:effectRef idx="0">
+            <a:schemeClr val="accent1"/>
+          </a:effectRef>
+          <a:fontRef idx="minor">
+            <a:schemeClr val="lt1"/>
+          </a:fontRef>
+        </p:style>
+        <p:txBody>
+          <a:bodyPr rtlCol="0" anchor="ctr"/>
+          <a:lstStyle/>
+          <a:p>
+            <a:pPr algn="ctr"/>
+            <a:r>
+              <a:rPr lang="en-US" altLang="ko-KR" sz="1100" dirty="0" err="1" smtClean="0"/>
+              <a:t>memmgr</a:t>
+            </a:r>
+            <a:endParaRPr lang="ko-KR" altLang="en-US" sz="1100" dirty="0"/>
+          </a:p>
+        </p:txBody>
+      </p:sp>
+      <p:sp>
+        <p:nvSpPr>
+          <p:cNvPr id="66" name="모서리가 둥근 직사각형 65"/>
+          <p:cNvSpPr/>
+          <p:nvPr/>
+        </p:nvSpPr>
+        <p:spPr>
+          <a:xfrm>
+            <a:off x="2903793" y="1175133"/>
+            <a:ext cx="1133966" cy="257720"/>
+          </a:xfrm>
+          <a:prstGeom prst="roundRect">
+            <a:avLst/>
+          </a:prstGeom>
+          <a:solidFill>
+            <a:schemeClr val="tx1"/>
+          </a:solidFill>
+          <a:ln>
+            <a:noFill/>
+          </a:ln>
+        </p:spPr>
+        <p:style>
+          <a:lnRef idx="2">
+            <a:schemeClr val="accent1">
+              <a:shade val="50000"/>
+            </a:schemeClr>
+          </a:lnRef>
+          <a:fillRef idx="1">
+            <a:schemeClr val="accent1"/>
+          </a:fillRef>
+          <a:effectRef idx="0">
+            <a:schemeClr val="accent1"/>
+          </a:effectRef>
+          <a:fontRef idx="minor">
+            <a:schemeClr val="lt1"/>
+          </a:fontRef>
+        </p:style>
+        <p:txBody>
+          <a:bodyPr rtlCol="0" anchor="ctr"/>
+          <a:lstStyle/>
+          <a:p>
+            <a:pPr algn="ctr"/>
+            <a:r>
+              <a:rPr lang="en-US" altLang="ko-KR" sz="1100" dirty="0" err="1" smtClean="0"/>
+              <a:t>datastructure</a:t>
+            </a:r>
+            <a:endParaRPr lang="ko-KR" altLang="en-US" sz="1100" dirty="0"/>
+          </a:p>
+        </p:txBody>
+      </p:sp>
+      <p:cxnSp>
+        <p:nvCxnSpPr>
+          <p:cNvPr id="67" name="직선 연결선 66"/>
+          <p:cNvCxnSpPr>
+            <a:stCxn id="42" idx="0"/>
+            <a:endCxn id="66" idx="2"/>
+          </p:cNvCxnSpPr>
+          <p:nvPr/>
+        </p:nvCxnSpPr>
+        <p:spPr>
+          <a:xfrm flipV="1">
+            <a:off x="3470776" y="1432853"/>
+            <a:ext cx="0" cy="158321"/>
+          </a:xfrm>
+          <a:prstGeom prst="line">
+            <a:avLst/>
+          </a:prstGeom>
+          <a:ln w="12700">
+            <a:solidFill>
+              <a:schemeClr val="tx1"/>
+            </a:solidFill>
+          </a:ln>
+        </p:spPr>
+        <p:style>
+          <a:lnRef idx="1">
+            <a:schemeClr val="accent1"/>
+          </a:lnRef>
+          <a:fillRef idx="0">
+            <a:schemeClr val="accent1"/>
+          </a:fillRef>
+          <a:effectRef idx="0">
+            <a:schemeClr val="accent1"/>
+          </a:effectRef>
+          <a:fontRef idx="minor">
+            <a:schemeClr val="tx1"/>
+          </a:fontRef>
+        </p:style>
+      </p:cxnSp>
+      <p:cxnSp>
+        <p:nvCxnSpPr>
+          <p:cNvPr id="77" name="직선 연결선 76"/>
+          <p:cNvCxnSpPr>
+            <a:stCxn id="5" idx="3"/>
+            <a:endCxn id="31" idx="1"/>
+          </p:cNvCxnSpPr>
+          <p:nvPr/>
+        </p:nvCxnSpPr>
+        <p:spPr>
+          <a:xfrm>
+            <a:off x="4037759" y="2139538"/>
+            <a:ext cx="1200474" cy="445086"/>
+          </a:xfrm>
+          <a:prstGeom prst="line">
+            <a:avLst/>
+          </a:prstGeom>
+          <a:ln w="12700">
+            <a:solidFill>
+              <a:schemeClr val="tx1"/>
+            </a:solidFill>
+          </a:ln>
+        </p:spPr>
+        <p:style>
+          <a:lnRef idx="1">
+            <a:schemeClr val="accent1"/>
+          </a:lnRef>
+          <a:fillRef idx="0">
+            <a:schemeClr val="accent1"/>
+          </a:fillRef>
+          <a:effectRef idx="0">
+            <a:schemeClr val="accent1"/>
+          </a:effectRef>
+          <a:fontRef idx="minor">
+            <a:schemeClr val="tx1"/>
+          </a:fontRef>
+        </p:style>
+      </p:cxnSp>
     </p:spTree>
     <p:extLst>
       <p:ext uri="{BB962C8B-B14F-4D97-AF65-F5344CB8AC3E}">
